--- a/Other_Docs/blood_bank_mini_project_presentation.pptx
+++ b/Other_Docs/blood_bank_mini_project_presentation.pptx
@@ -8,14 +8,22 @@
     <p:sldId id="256" r:id="rId2"/>
     <p:sldId id="267" r:id="rId3"/>
     <p:sldId id="257" r:id="rId4"/>
-    <p:sldId id="258" r:id="rId5"/>
-    <p:sldId id="259" r:id="rId6"/>
-    <p:sldId id="260" r:id="rId7"/>
-    <p:sldId id="261" r:id="rId8"/>
-    <p:sldId id="262" r:id="rId9"/>
-    <p:sldId id="263" r:id="rId10"/>
-    <p:sldId id="268" r:id="rId11"/>
-    <p:sldId id="266" r:id="rId12"/>
+    <p:sldId id="269" r:id="rId5"/>
+    <p:sldId id="258" r:id="rId6"/>
+    <p:sldId id="270" r:id="rId7"/>
+    <p:sldId id="259" r:id="rId8"/>
+    <p:sldId id="260" r:id="rId9"/>
+    <p:sldId id="261" r:id="rId10"/>
+    <p:sldId id="262" r:id="rId11"/>
+    <p:sldId id="268" r:id="rId12"/>
+    <p:sldId id="271" r:id="rId13"/>
+    <p:sldId id="272" r:id="rId14"/>
+    <p:sldId id="273" r:id="rId15"/>
+    <p:sldId id="274" r:id="rId16"/>
+    <p:sldId id="278" r:id="rId17"/>
+    <p:sldId id="277" r:id="rId18"/>
+    <p:sldId id="276" r:id="rId19"/>
+    <p:sldId id="266" r:id="rId20"/>
   </p:sldIdLst>
   <p:sldSz cx="9144000" cy="6858000" type="screen4x3"/>
   <p:notesSz cx="6858000" cy="9144000"/>
@@ -312,7 +320,7 @@
           <a:p>
             <a:fld id="{5BCAD085-E8A6-8845-BD4E-CB4CCA059FC4}" type="datetimeFigureOut">
               <a:rPr lang="en-US" smtClean="0"/>
-              <a:t>3/17/2026</a:t>
+              <a:t>4/11/2026</a:t>
             </a:fld>
             <a:endParaRPr lang="en-US"/>
           </a:p>
@@ -480,7 +488,7 @@
           <a:p>
             <a:fld id="{5BCAD085-E8A6-8845-BD4E-CB4CCA059FC4}" type="datetimeFigureOut">
               <a:rPr lang="en-US" smtClean="0"/>
-              <a:t>3/17/2026</a:t>
+              <a:t>4/11/2026</a:t>
             </a:fld>
             <a:endParaRPr lang="en-US"/>
           </a:p>
@@ -658,7 +666,7 @@
           <a:p>
             <a:fld id="{5BCAD085-E8A6-8845-BD4E-CB4CCA059FC4}" type="datetimeFigureOut">
               <a:rPr lang="en-US" smtClean="0"/>
-              <a:t>3/17/2026</a:t>
+              <a:t>4/11/2026</a:t>
             </a:fld>
             <a:endParaRPr lang="en-US"/>
           </a:p>
@@ -826,7 +834,7 @@
           <a:p>
             <a:fld id="{5BCAD085-E8A6-8845-BD4E-CB4CCA059FC4}" type="datetimeFigureOut">
               <a:rPr lang="en-US" smtClean="0"/>
-              <a:t>3/17/2026</a:t>
+              <a:t>4/11/2026</a:t>
             </a:fld>
             <a:endParaRPr lang="en-US"/>
           </a:p>
@@ -1071,7 +1079,7 @@
           <a:p>
             <a:fld id="{5BCAD085-E8A6-8845-BD4E-CB4CCA059FC4}" type="datetimeFigureOut">
               <a:rPr lang="en-US" smtClean="0"/>
-              <a:t>3/17/2026</a:t>
+              <a:t>4/11/2026</a:t>
             </a:fld>
             <a:endParaRPr lang="en-US"/>
           </a:p>
@@ -1356,7 +1364,7 @@
           <a:p>
             <a:fld id="{5BCAD085-E8A6-8845-BD4E-CB4CCA059FC4}" type="datetimeFigureOut">
               <a:rPr lang="en-US" smtClean="0"/>
-              <a:t>3/17/2026</a:t>
+              <a:t>4/11/2026</a:t>
             </a:fld>
             <a:endParaRPr lang="en-US"/>
           </a:p>
@@ -1775,7 +1783,7 @@
           <a:p>
             <a:fld id="{5BCAD085-E8A6-8845-BD4E-CB4CCA059FC4}" type="datetimeFigureOut">
               <a:rPr lang="en-US" smtClean="0"/>
-              <a:t>3/17/2026</a:t>
+              <a:t>4/11/2026</a:t>
             </a:fld>
             <a:endParaRPr lang="en-US"/>
           </a:p>
@@ -1892,7 +1900,7 @@
           <a:p>
             <a:fld id="{5BCAD085-E8A6-8845-BD4E-CB4CCA059FC4}" type="datetimeFigureOut">
               <a:rPr lang="en-US" smtClean="0"/>
-              <a:t>3/17/2026</a:t>
+              <a:t>4/11/2026</a:t>
             </a:fld>
             <a:endParaRPr lang="en-US"/>
           </a:p>
@@ -1987,7 +1995,7 @@
           <a:p>
             <a:fld id="{5BCAD085-E8A6-8845-BD4E-CB4CCA059FC4}" type="datetimeFigureOut">
               <a:rPr lang="en-US" smtClean="0"/>
-              <a:t>3/17/2026</a:t>
+              <a:t>4/11/2026</a:t>
             </a:fld>
             <a:endParaRPr lang="en-US"/>
           </a:p>
@@ -2262,7 +2270,7 @@
           <a:p>
             <a:fld id="{5BCAD085-E8A6-8845-BD4E-CB4CCA059FC4}" type="datetimeFigureOut">
               <a:rPr lang="en-US" smtClean="0"/>
-              <a:t>3/17/2026</a:t>
+              <a:t>4/11/2026</a:t>
             </a:fld>
             <a:endParaRPr lang="en-US"/>
           </a:p>
@@ -2514,7 +2522,7 @@
           <a:p>
             <a:fld id="{5BCAD085-E8A6-8845-BD4E-CB4CCA059FC4}" type="datetimeFigureOut">
               <a:rPr lang="en-US" smtClean="0"/>
-              <a:t>3/17/2026</a:t>
+              <a:t>4/11/2026</a:t>
             </a:fld>
             <a:endParaRPr lang="en-US"/>
           </a:p>
@@ -2725,7 +2733,7 @@
           <a:p>
             <a:fld id="{5BCAD085-E8A6-8845-BD4E-CB4CCA059FC4}" type="datetimeFigureOut">
               <a:rPr lang="en-US" smtClean="0"/>
-              <a:t>3/17/2026</a:t>
+              <a:t>4/11/2026</a:t>
             </a:fld>
             <a:endParaRPr lang="en-US"/>
           </a:p>
@@ -3102,10 +3110,10 @@
       </p:grpSpPr>
       <p:sp>
         <p:nvSpPr>
-          <p:cNvPr id="4" name="Title 3">
+          <p:cNvPr id="5" name="Title 4">
             <a:extLst>
               <a:ext uri="{FF2B5EF4-FFF2-40B4-BE49-F238E27FC236}">
-                <a16:creationId xmlns:a16="http://schemas.microsoft.com/office/drawing/2014/main" id="{4C2EC432-F763-FCBC-49F3-66A79E744208}"/>
+                <a16:creationId xmlns:a16="http://schemas.microsoft.com/office/drawing/2014/main" id="{71F3D7CF-403A-D107-867C-9E54A798102D}"/>
               </a:ext>
             </a:extLst>
           </p:cNvPr>
@@ -3116,63 +3124,24 @@
             <p:ph type="ctrTitle"/>
           </p:nvPr>
         </p:nvSpPr>
-        <p:spPr>
-          <a:xfrm>
-            <a:off x="1371600" y="2137082"/>
-            <a:ext cx="6400800" cy="841375"/>
-          </a:xfrm>
-        </p:spPr>
-        <p:txBody>
-          <a:bodyPr>
-            <a:normAutofit fontScale="90000"/>
-          </a:bodyPr>
+        <p:spPr/>
+        <p:txBody>
+          <a:bodyPr/>
           <a:lstStyle/>
           <a:p>
             <a:r>
-              <a:rPr lang="en-IN" dirty="0"/>
-              <a:t>Web Development Mini Project</a:t>
-            </a:r>
-          </a:p>
-        </p:txBody>
-      </p:sp>
-      <p:sp>
-        <p:nvSpPr>
-          <p:cNvPr id="3" name="Content Placeholder 2"/>
-          <p:cNvSpPr>
-            <a:spLocks noGrp="1"/>
-          </p:cNvSpPr>
-          <p:nvPr>
-            <p:ph type="subTitle" idx="1"/>
-          </p:nvPr>
-        </p:nvSpPr>
-        <p:spPr>
-          <a:xfrm>
-            <a:off x="1302774" y="4191000"/>
-            <a:ext cx="6400800" cy="1752600"/>
-          </a:xfrm>
-        </p:spPr>
-        <p:txBody>
-          <a:bodyPr>
-            <a:normAutofit/>
-          </a:bodyPr>
-          <a:lstStyle/>
-          <a:p>
-            <a:r>
-              <a:rPr lang="en-IN" dirty="0">
+              <a:rPr lang="en-US" dirty="0">
                 <a:solidFill>
-                  <a:schemeClr val="tx1"/>
-                </a:solidFill>
-              </a:rPr>
-              <a:t>Topic: </a:t>
-            </a:r>
-            <a:r>
-              <a:rPr dirty="0">
-                <a:solidFill>
-                  <a:schemeClr val="tx1"/>
+                  <a:srgbClr val="FF0000"/>
                 </a:solidFill>
               </a:rPr>
               <a:t>Blood Bank and Donor Management System</a:t>
             </a:r>
+            <a:endParaRPr lang="en-IN" dirty="0">
+              <a:solidFill>
+                <a:srgbClr val="FF0000"/>
+              </a:solidFill>
+            </a:endParaRPr>
           </a:p>
         </p:txBody>
       </p:sp>
@@ -3201,42 +3170,97 @@
           <a:chExt cx="0" cy="0"/>
         </a:xfrm>
       </p:grpSpPr>
-      <p:pic>
-        <p:nvPicPr>
-          <p:cNvPr id="5" name="Picture 4">
-            <a:extLst>
-              <a:ext uri="{FF2B5EF4-FFF2-40B4-BE49-F238E27FC236}">
-                <a16:creationId xmlns:a16="http://schemas.microsoft.com/office/drawing/2014/main" id="{E577EB38-B461-0E8A-6004-8DCE3D1E014E}"/>
-              </a:ext>
-            </a:extLst>
-          </p:cNvPr>
-          <p:cNvPicPr>
-            <a:picLocks noChangeAspect="1"/>
-          </p:cNvPicPr>
-          <p:nvPr/>
-        </p:nvPicPr>
-        <p:blipFill>
-          <a:blip r:embed="rId2"/>
-          <a:stretch>
-            <a:fillRect/>
-          </a:stretch>
-        </p:blipFill>
-        <p:spPr>
-          <a:xfrm>
-            <a:off x="727408" y="1317523"/>
-            <a:ext cx="7618944" cy="3853815"/>
-          </a:xfrm>
-          <a:prstGeom prst="rect">
-            <a:avLst/>
-          </a:prstGeom>
-        </p:spPr>
-      </p:pic>
+      <p:sp>
+        <p:nvSpPr>
+          <p:cNvPr id="2" name="Title 1"/>
+          <p:cNvSpPr>
+            <a:spLocks noGrp="1"/>
+          </p:cNvSpPr>
+          <p:nvPr>
+            <p:ph type="title"/>
+          </p:nvPr>
+        </p:nvSpPr>
+        <p:spPr/>
+        <p:txBody>
+          <a:bodyPr/>
+          <a:lstStyle/>
+          <a:p>
+            <a:r>
+              <a:rPr dirty="0">
+                <a:solidFill>
+                  <a:srgbClr val="FF0000"/>
+                </a:solidFill>
+              </a:rPr>
+              <a:t>Database Design</a:t>
+            </a:r>
+          </a:p>
+        </p:txBody>
+      </p:sp>
+      <p:sp>
+        <p:nvSpPr>
+          <p:cNvPr id="3" name="Content Placeholder 2"/>
+          <p:cNvSpPr>
+            <a:spLocks noGrp="1"/>
+          </p:cNvSpPr>
+          <p:nvPr>
+            <p:ph idx="1"/>
+          </p:nvPr>
+        </p:nvSpPr>
+        <p:spPr/>
+        <p:txBody>
+          <a:bodyPr/>
+          <a:lstStyle/>
+          <a:p>
+            <a:pPr marL="0" indent="0">
+              <a:buNone/>
+            </a:pPr>
+            <a:r>
+              <a:rPr dirty="0"/>
+              <a:t>Tables Used:</a:t>
+            </a:r>
+          </a:p>
+          <a:p>
+            <a:r>
+              <a:rPr dirty="0"/>
+              <a:t>donors</a:t>
+            </a:r>
+          </a:p>
+          <a:p>
+            <a:r>
+              <a:rPr dirty="0" err="1"/>
+              <a:t>blood_requests</a:t>
+            </a:r>
+            <a:endParaRPr dirty="0"/>
+          </a:p>
+          <a:p>
+            <a:r>
+              <a:rPr lang="en-IN" dirty="0"/>
+              <a:t>A</a:t>
+            </a:r>
+            <a:r>
+              <a:rPr dirty="0" err="1"/>
+              <a:t>dmin</a:t>
+            </a:r>
+            <a:endParaRPr lang="en-IN" dirty="0"/>
+          </a:p>
+          <a:p>
+            <a:pPr marL="0" indent="0">
+              <a:buNone/>
+            </a:pPr>
+            <a:endParaRPr dirty="0"/>
+          </a:p>
+          <a:p>
+            <a:pPr marL="0" indent="0">
+              <a:buNone/>
+            </a:pPr>
+            <a:r>
+              <a:rPr dirty="0"/>
+              <a:t>The database stores donor details and blood requests.</a:t>
+            </a:r>
+          </a:p>
+        </p:txBody>
+      </p:sp>
     </p:spTree>
-    <p:extLst>
-      <p:ext uri="{BB962C8B-B14F-4D97-AF65-F5344CB8AC3E}">
-        <p14:creationId xmlns:p14="http://schemas.microsoft.com/office/powerpoint/2010/main" val="1980144325"/>
-      </p:ext>
-    </p:extLst>
   </p:cSld>
   <p:clrMapOvr>
     <a:masterClrMapping/>
@@ -3261,9 +3285,528 @@
           <a:chExt cx="0" cy="0"/>
         </a:xfrm>
       </p:grpSpPr>
-      <p:sp>
-        <p:nvSpPr>
-          <p:cNvPr id="2" name="Title 1"/>
+      <p:pic>
+        <p:nvPicPr>
+          <p:cNvPr id="18" name="Picture 17">
+            <a:extLst>
+              <a:ext uri="{FF2B5EF4-FFF2-40B4-BE49-F238E27FC236}">
+                <a16:creationId xmlns:a16="http://schemas.microsoft.com/office/drawing/2014/main" id="{7EC2406B-23E9-423E-6DAC-836644C02B10}"/>
+              </a:ext>
+            </a:extLst>
+          </p:cNvPr>
+          <p:cNvPicPr>
+            <a:picLocks noChangeAspect="1"/>
+          </p:cNvPicPr>
+          <p:nvPr/>
+        </p:nvPicPr>
+        <p:blipFill rotWithShape="1">
+          <a:blip r:embed="rId2"/>
+          <a:srcRect/>
+          <a:stretch>
+            <a:fillRect/>
+          </a:stretch>
+        </p:blipFill>
+        <p:spPr>
+          <a:xfrm>
+            <a:off x="0" y="1056987"/>
+            <a:ext cx="9144000" cy="4744026"/>
+          </a:xfrm>
+          <a:prstGeom prst="rect">
+            <a:avLst/>
+          </a:prstGeom>
+        </p:spPr>
+      </p:pic>
+    </p:spTree>
+    <p:extLst>
+      <p:ext uri="{BB962C8B-B14F-4D97-AF65-F5344CB8AC3E}">
+        <p14:creationId xmlns:p14="http://schemas.microsoft.com/office/powerpoint/2010/main" val="1980144325"/>
+      </p:ext>
+    </p:extLst>
+  </p:cSld>
+  <p:clrMapOvr>
+    <a:masterClrMapping/>
+  </p:clrMapOvr>
+</p:sld>
+</file>
+
+<file path=ppt/slides/slide12.xml><?xml version="1.0" encoding="utf-8"?>
+<p:sld xmlns:a="http://schemas.openxmlformats.org/drawingml/2006/main" xmlns:r="http://schemas.openxmlformats.org/officeDocument/2006/relationships" xmlns:p="http://schemas.openxmlformats.org/presentationml/2006/main">
+  <p:cSld>
+    <p:spTree>
+      <p:nvGrpSpPr>
+        <p:cNvPr id="1" name=""/>
+        <p:cNvGrpSpPr/>
+        <p:nvPr/>
+      </p:nvGrpSpPr>
+      <p:grpSpPr>
+        <a:xfrm>
+          <a:off x="0" y="0"/>
+          <a:ext cx="0" cy="0"/>
+          <a:chOff x="0" y="0"/>
+          <a:chExt cx="0" cy="0"/>
+        </a:xfrm>
+      </p:grpSpPr>
+      <p:pic>
+        <p:nvPicPr>
+          <p:cNvPr id="3" name="Picture 2">
+            <a:extLst>
+              <a:ext uri="{FF2B5EF4-FFF2-40B4-BE49-F238E27FC236}">
+                <a16:creationId xmlns:a16="http://schemas.microsoft.com/office/drawing/2014/main" id="{FA6CEEE4-8525-74A9-AC80-CBB650FFC023}"/>
+              </a:ext>
+            </a:extLst>
+          </p:cNvPr>
+          <p:cNvPicPr>
+            <a:picLocks noChangeAspect="1"/>
+          </p:cNvPicPr>
+          <p:nvPr/>
+        </p:nvPicPr>
+        <p:blipFill>
+          <a:blip r:embed="rId2"/>
+          <a:srcRect l="31935" r="29033"/>
+          <a:stretch>
+            <a:fillRect/>
+          </a:stretch>
+        </p:blipFill>
+        <p:spPr>
+          <a:xfrm>
+            <a:off x="501445" y="892870"/>
+            <a:ext cx="3569109" cy="4619975"/>
+          </a:xfrm>
+          <a:prstGeom prst="rect">
+            <a:avLst/>
+          </a:prstGeom>
+        </p:spPr>
+      </p:pic>
+      <p:pic>
+        <p:nvPicPr>
+          <p:cNvPr id="7" name="Picture 6">
+            <a:extLst>
+              <a:ext uri="{FF2B5EF4-FFF2-40B4-BE49-F238E27FC236}">
+                <a16:creationId xmlns:a16="http://schemas.microsoft.com/office/drawing/2014/main" id="{4FDDAF1E-DF95-3258-6024-733242D1FF2D}"/>
+              </a:ext>
+            </a:extLst>
+          </p:cNvPr>
+          <p:cNvPicPr>
+            <a:picLocks noChangeAspect="1"/>
+          </p:cNvPicPr>
+          <p:nvPr/>
+        </p:nvPicPr>
+        <p:blipFill>
+          <a:blip r:embed="rId3"/>
+          <a:srcRect l="31935" r="33763"/>
+          <a:stretch>
+            <a:fillRect/>
+          </a:stretch>
+        </p:blipFill>
+        <p:spPr>
+          <a:xfrm>
+            <a:off x="4866968" y="964707"/>
+            <a:ext cx="3136490" cy="4548138"/>
+          </a:xfrm>
+          <a:prstGeom prst="rect">
+            <a:avLst/>
+          </a:prstGeom>
+        </p:spPr>
+      </p:pic>
+    </p:spTree>
+    <p:extLst>
+      <p:ext uri="{BB962C8B-B14F-4D97-AF65-F5344CB8AC3E}">
+        <p14:creationId xmlns:p14="http://schemas.microsoft.com/office/powerpoint/2010/main" val="530827643"/>
+      </p:ext>
+    </p:extLst>
+  </p:cSld>
+  <p:clrMapOvr>
+    <a:masterClrMapping/>
+  </p:clrMapOvr>
+</p:sld>
+</file>
+
+<file path=ppt/slides/slide13.xml><?xml version="1.0" encoding="utf-8"?>
+<p:sld xmlns:a="http://schemas.openxmlformats.org/drawingml/2006/main" xmlns:r="http://schemas.openxmlformats.org/officeDocument/2006/relationships" xmlns:p="http://schemas.openxmlformats.org/presentationml/2006/main">
+  <p:cSld>
+    <p:spTree>
+      <p:nvGrpSpPr>
+        <p:cNvPr id="1" name=""/>
+        <p:cNvGrpSpPr/>
+        <p:nvPr/>
+      </p:nvGrpSpPr>
+      <p:grpSpPr>
+        <a:xfrm>
+          <a:off x="0" y="0"/>
+          <a:ext cx="0" cy="0"/>
+          <a:chOff x="0" y="0"/>
+          <a:chExt cx="0" cy="0"/>
+        </a:xfrm>
+      </p:grpSpPr>
+      <p:pic>
+        <p:nvPicPr>
+          <p:cNvPr id="3" name="Picture 2">
+            <a:extLst>
+              <a:ext uri="{FF2B5EF4-FFF2-40B4-BE49-F238E27FC236}">
+                <a16:creationId xmlns:a16="http://schemas.microsoft.com/office/drawing/2014/main" id="{362AAA10-F92C-97C9-D9EC-B0CCAADBBABC}"/>
+              </a:ext>
+            </a:extLst>
+          </p:cNvPr>
+          <p:cNvPicPr>
+            <a:picLocks noChangeAspect="1"/>
+          </p:cNvPicPr>
+          <p:nvPr/>
+        </p:nvPicPr>
+        <p:blipFill>
+          <a:blip r:embed="rId2"/>
+          <a:stretch>
+            <a:fillRect/>
+          </a:stretch>
+        </p:blipFill>
+        <p:spPr>
+          <a:xfrm>
+            <a:off x="0" y="1112968"/>
+            <a:ext cx="9144000" cy="4632063"/>
+          </a:xfrm>
+          <a:prstGeom prst="rect">
+            <a:avLst/>
+          </a:prstGeom>
+        </p:spPr>
+      </p:pic>
+    </p:spTree>
+    <p:extLst>
+      <p:ext uri="{BB962C8B-B14F-4D97-AF65-F5344CB8AC3E}">
+        <p14:creationId xmlns:p14="http://schemas.microsoft.com/office/powerpoint/2010/main" val="385851187"/>
+      </p:ext>
+    </p:extLst>
+  </p:cSld>
+  <p:clrMapOvr>
+    <a:masterClrMapping/>
+  </p:clrMapOvr>
+</p:sld>
+</file>
+
+<file path=ppt/slides/slide14.xml><?xml version="1.0" encoding="utf-8"?>
+<p:sld xmlns:a="http://schemas.openxmlformats.org/drawingml/2006/main" xmlns:r="http://schemas.openxmlformats.org/officeDocument/2006/relationships" xmlns:p="http://schemas.openxmlformats.org/presentationml/2006/main">
+  <p:cSld>
+    <p:spTree>
+      <p:nvGrpSpPr>
+        <p:cNvPr id="1" name=""/>
+        <p:cNvGrpSpPr/>
+        <p:nvPr/>
+      </p:nvGrpSpPr>
+      <p:grpSpPr>
+        <a:xfrm>
+          <a:off x="0" y="0"/>
+          <a:ext cx="0" cy="0"/>
+          <a:chOff x="0" y="0"/>
+          <a:chExt cx="0" cy="0"/>
+        </a:xfrm>
+      </p:grpSpPr>
+      <p:pic>
+        <p:nvPicPr>
+          <p:cNvPr id="3" name="Picture 2">
+            <a:extLst>
+              <a:ext uri="{FF2B5EF4-FFF2-40B4-BE49-F238E27FC236}">
+                <a16:creationId xmlns:a16="http://schemas.microsoft.com/office/drawing/2014/main" id="{CA88BE2C-FB6B-34BE-CF8D-C56271498557}"/>
+              </a:ext>
+            </a:extLst>
+          </p:cNvPr>
+          <p:cNvPicPr>
+            <a:picLocks noChangeAspect="1"/>
+          </p:cNvPicPr>
+          <p:nvPr/>
+        </p:nvPicPr>
+        <p:blipFill>
+          <a:blip r:embed="rId2"/>
+          <a:stretch>
+            <a:fillRect/>
+          </a:stretch>
+        </p:blipFill>
+        <p:spPr>
+          <a:xfrm>
+            <a:off x="0" y="1206935"/>
+            <a:ext cx="9144000" cy="4444129"/>
+          </a:xfrm>
+          <a:prstGeom prst="rect">
+            <a:avLst/>
+          </a:prstGeom>
+        </p:spPr>
+      </p:pic>
+    </p:spTree>
+    <p:extLst>
+      <p:ext uri="{BB962C8B-B14F-4D97-AF65-F5344CB8AC3E}">
+        <p14:creationId xmlns:p14="http://schemas.microsoft.com/office/powerpoint/2010/main" val="1510062564"/>
+      </p:ext>
+    </p:extLst>
+  </p:cSld>
+  <p:clrMapOvr>
+    <a:masterClrMapping/>
+  </p:clrMapOvr>
+</p:sld>
+</file>
+
+<file path=ppt/slides/slide15.xml><?xml version="1.0" encoding="utf-8"?>
+<p:sld xmlns:a="http://schemas.openxmlformats.org/drawingml/2006/main" xmlns:r="http://schemas.openxmlformats.org/officeDocument/2006/relationships" xmlns:p="http://schemas.openxmlformats.org/presentationml/2006/main">
+  <p:cSld>
+    <p:spTree>
+      <p:nvGrpSpPr>
+        <p:cNvPr id="1" name=""/>
+        <p:cNvGrpSpPr/>
+        <p:nvPr/>
+      </p:nvGrpSpPr>
+      <p:grpSpPr>
+        <a:xfrm>
+          <a:off x="0" y="0"/>
+          <a:ext cx="0" cy="0"/>
+          <a:chOff x="0" y="0"/>
+          <a:chExt cx="0" cy="0"/>
+        </a:xfrm>
+      </p:grpSpPr>
+      <p:pic>
+        <p:nvPicPr>
+          <p:cNvPr id="5" name="Picture 4">
+            <a:extLst>
+              <a:ext uri="{FF2B5EF4-FFF2-40B4-BE49-F238E27FC236}">
+                <a16:creationId xmlns:a16="http://schemas.microsoft.com/office/drawing/2014/main" id="{9AA67AF8-E826-1B43-A742-276EB738421B}"/>
+              </a:ext>
+            </a:extLst>
+          </p:cNvPr>
+          <p:cNvPicPr>
+            <a:picLocks noChangeAspect="1"/>
+          </p:cNvPicPr>
+          <p:nvPr/>
+        </p:nvPicPr>
+        <p:blipFill>
+          <a:blip r:embed="rId2"/>
+          <a:stretch>
+            <a:fillRect/>
+          </a:stretch>
+        </p:blipFill>
+        <p:spPr>
+          <a:xfrm>
+            <a:off x="0" y="1400443"/>
+            <a:ext cx="9144000" cy="4057113"/>
+          </a:xfrm>
+          <a:prstGeom prst="rect">
+            <a:avLst/>
+          </a:prstGeom>
+        </p:spPr>
+      </p:pic>
+    </p:spTree>
+    <p:extLst>
+      <p:ext uri="{BB962C8B-B14F-4D97-AF65-F5344CB8AC3E}">
+        <p14:creationId xmlns:p14="http://schemas.microsoft.com/office/powerpoint/2010/main" val="3473218634"/>
+      </p:ext>
+    </p:extLst>
+  </p:cSld>
+  <p:clrMapOvr>
+    <a:masterClrMapping/>
+  </p:clrMapOvr>
+</p:sld>
+</file>
+
+<file path=ppt/slides/slide16.xml><?xml version="1.0" encoding="utf-8"?>
+<p:sld xmlns:a="http://schemas.openxmlformats.org/drawingml/2006/main" xmlns:r="http://schemas.openxmlformats.org/officeDocument/2006/relationships" xmlns:p="http://schemas.openxmlformats.org/presentationml/2006/main">
+  <p:cSld>
+    <p:spTree>
+      <p:nvGrpSpPr>
+        <p:cNvPr id="1" name=""/>
+        <p:cNvGrpSpPr/>
+        <p:nvPr/>
+      </p:nvGrpSpPr>
+      <p:grpSpPr>
+        <a:xfrm>
+          <a:off x="0" y="0"/>
+          <a:ext cx="0" cy="0"/>
+          <a:chOff x="0" y="0"/>
+          <a:chExt cx="0" cy="0"/>
+        </a:xfrm>
+      </p:grpSpPr>
+      <p:pic>
+        <p:nvPicPr>
+          <p:cNvPr id="3" name="Picture 2">
+            <a:extLst>
+              <a:ext uri="{FF2B5EF4-FFF2-40B4-BE49-F238E27FC236}">
+                <a16:creationId xmlns:a16="http://schemas.microsoft.com/office/drawing/2014/main" id="{09ABC9FA-2C44-EED1-491E-5321B5F3C3F6}"/>
+              </a:ext>
+            </a:extLst>
+          </p:cNvPr>
+          <p:cNvPicPr>
+            <a:picLocks noChangeAspect="1"/>
+          </p:cNvPicPr>
+          <p:nvPr/>
+        </p:nvPicPr>
+        <p:blipFill>
+          <a:blip r:embed="rId2"/>
+          <a:stretch>
+            <a:fillRect/>
+          </a:stretch>
+        </p:blipFill>
+        <p:spPr>
+          <a:xfrm>
+            <a:off x="0" y="1234056"/>
+            <a:ext cx="9144000" cy="4389887"/>
+          </a:xfrm>
+          <a:prstGeom prst="rect">
+            <a:avLst/>
+          </a:prstGeom>
+        </p:spPr>
+      </p:pic>
+    </p:spTree>
+    <p:extLst>
+      <p:ext uri="{BB962C8B-B14F-4D97-AF65-F5344CB8AC3E}">
+        <p14:creationId xmlns:p14="http://schemas.microsoft.com/office/powerpoint/2010/main" val="1742631620"/>
+      </p:ext>
+    </p:extLst>
+  </p:cSld>
+  <p:clrMapOvr>
+    <a:masterClrMapping/>
+  </p:clrMapOvr>
+</p:sld>
+</file>
+
+<file path=ppt/slides/slide17.xml><?xml version="1.0" encoding="utf-8"?>
+<p:sld xmlns:a="http://schemas.openxmlformats.org/drawingml/2006/main" xmlns:r="http://schemas.openxmlformats.org/officeDocument/2006/relationships" xmlns:p="http://schemas.openxmlformats.org/presentationml/2006/main">
+  <p:cSld>
+    <p:spTree>
+      <p:nvGrpSpPr>
+        <p:cNvPr id="1" name=""/>
+        <p:cNvGrpSpPr/>
+        <p:nvPr/>
+      </p:nvGrpSpPr>
+      <p:grpSpPr>
+        <a:xfrm>
+          <a:off x="0" y="0"/>
+          <a:ext cx="0" cy="0"/>
+          <a:chOff x="0" y="0"/>
+          <a:chExt cx="0" cy="0"/>
+        </a:xfrm>
+      </p:grpSpPr>
+      <p:pic>
+        <p:nvPicPr>
+          <p:cNvPr id="3" name="Picture 2">
+            <a:extLst>
+              <a:ext uri="{FF2B5EF4-FFF2-40B4-BE49-F238E27FC236}">
+                <a16:creationId xmlns:a16="http://schemas.microsoft.com/office/drawing/2014/main" id="{554149A0-27AB-08F5-121E-372F0EFDFB79}"/>
+              </a:ext>
+            </a:extLst>
+          </p:cNvPr>
+          <p:cNvPicPr>
+            <a:picLocks noChangeAspect="1"/>
+          </p:cNvPicPr>
+          <p:nvPr/>
+        </p:nvPicPr>
+        <p:blipFill>
+          <a:blip r:embed="rId2"/>
+          <a:stretch>
+            <a:fillRect/>
+          </a:stretch>
+        </p:blipFill>
+        <p:spPr>
+          <a:xfrm>
+            <a:off x="0" y="1210235"/>
+            <a:ext cx="9144000" cy="4437529"/>
+          </a:xfrm>
+          <a:prstGeom prst="rect">
+            <a:avLst/>
+          </a:prstGeom>
+        </p:spPr>
+      </p:pic>
+    </p:spTree>
+    <p:extLst>
+      <p:ext uri="{BB962C8B-B14F-4D97-AF65-F5344CB8AC3E}">
+        <p14:creationId xmlns:p14="http://schemas.microsoft.com/office/powerpoint/2010/main" val="2738415220"/>
+      </p:ext>
+    </p:extLst>
+  </p:cSld>
+  <p:clrMapOvr>
+    <a:masterClrMapping/>
+  </p:clrMapOvr>
+</p:sld>
+</file>
+
+<file path=ppt/slides/slide18.xml><?xml version="1.0" encoding="utf-8"?>
+<p:sld xmlns:a="http://schemas.openxmlformats.org/drawingml/2006/main" xmlns:r="http://schemas.openxmlformats.org/officeDocument/2006/relationships" xmlns:p="http://schemas.openxmlformats.org/presentationml/2006/main">
+  <p:cSld>
+    <p:spTree>
+      <p:nvGrpSpPr>
+        <p:cNvPr id="1" name=""/>
+        <p:cNvGrpSpPr/>
+        <p:nvPr/>
+      </p:nvGrpSpPr>
+      <p:grpSpPr>
+        <a:xfrm>
+          <a:off x="0" y="0"/>
+          <a:ext cx="0" cy="0"/>
+          <a:chOff x="0" y="0"/>
+          <a:chExt cx="0" cy="0"/>
+        </a:xfrm>
+      </p:grpSpPr>
+      <p:pic>
+        <p:nvPicPr>
+          <p:cNvPr id="3" name="Picture 2">
+            <a:extLst>
+              <a:ext uri="{FF2B5EF4-FFF2-40B4-BE49-F238E27FC236}">
+                <a16:creationId xmlns:a16="http://schemas.microsoft.com/office/drawing/2014/main" id="{0A21BF7E-DDEF-909C-8162-1366D0251F57}"/>
+              </a:ext>
+            </a:extLst>
+          </p:cNvPr>
+          <p:cNvPicPr>
+            <a:picLocks noChangeAspect="1"/>
+          </p:cNvPicPr>
+          <p:nvPr/>
+        </p:nvPicPr>
+        <p:blipFill>
+          <a:blip r:embed="rId2"/>
+          <a:stretch>
+            <a:fillRect/>
+          </a:stretch>
+        </p:blipFill>
+        <p:spPr>
+          <a:xfrm>
+            <a:off x="0" y="1231435"/>
+            <a:ext cx="9144000" cy="4395129"/>
+          </a:xfrm>
+          <a:prstGeom prst="rect">
+            <a:avLst/>
+          </a:prstGeom>
+        </p:spPr>
+      </p:pic>
+    </p:spTree>
+    <p:extLst>
+      <p:ext uri="{BB962C8B-B14F-4D97-AF65-F5344CB8AC3E}">
+        <p14:creationId xmlns:p14="http://schemas.microsoft.com/office/powerpoint/2010/main" val="2402344645"/>
+      </p:ext>
+    </p:extLst>
+  </p:cSld>
+  <p:clrMapOvr>
+    <a:masterClrMapping/>
+  </p:clrMapOvr>
+</p:sld>
+</file>
+
+<file path=ppt/slides/slide19.xml><?xml version="1.0" encoding="utf-8"?>
+<p:sld xmlns:a="http://schemas.openxmlformats.org/drawingml/2006/main" xmlns:r="http://schemas.openxmlformats.org/officeDocument/2006/relationships" xmlns:p="http://schemas.openxmlformats.org/presentationml/2006/main">
+  <p:cSld>
+    <p:spTree>
+      <p:nvGrpSpPr>
+        <p:cNvPr id="1" name=""/>
+        <p:cNvGrpSpPr/>
+        <p:nvPr/>
+      </p:nvGrpSpPr>
+      <p:grpSpPr>
+        <a:xfrm>
+          <a:off x="0" y="0"/>
+          <a:ext cx="0" cy="0"/>
+          <a:chOff x="0" y="0"/>
+          <a:chExt cx="0" cy="0"/>
+        </a:xfrm>
+      </p:grpSpPr>
+      <p:sp>
+        <p:nvSpPr>
+          <p:cNvPr id="5" name="Title 4">
+            <a:extLst>
+              <a:ext uri="{FF2B5EF4-FFF2-40B4-BE49-F238E27FC236}">
+                <a16:creationId xmlns:a16="http://schemas.microsoft.com/office/drawing/2014/main" id="{184603AB-453F-F150-E44F-614E1F74ED08}"/>
+              </a:ext>
+            </a:extLst>
+          </p:cNvPr>
           <p:cNvSpPr>
             <a:spLocks noGrp="1"/>
           </p:cNvSpPr>
@@ -3271,39 +3814,23 @@
             <p:ph type="title"/>
           </p:nvPr>
         </p:nvSpPr>
-        <p:spPr/>
+        <p:spPr>
+          <a:xfrm>
+            <a:off x="555523" y="2506561"/>
+            <a:ext cx="8229600" cy="1143000"/>
+          </a:xfrm>
+        </p:spPr>
         <p:txBody>
           <a:bodyPr/>
           <a:lstStyle/>
           <a:p>
             <a:r>
-              <a:t>Conclusion</a:t>
-            </a:r>
-          </a:p>
-        </p:txBody>
-      </p:sp>
-      <p:sp>
-        <p:nvSpPr>
-          <p:cNvPr id="3" name="Content Placeholder 2"/>
-          <p:cNvSpPr>
-            <a:spLocks noGrp="1"/>
-          </p:cNvSpPr>
-          <p:nvPr>
-            <p:ph idx="1"/>
-          </p:nvPr>
-        </p:nvSpPr>
-        <p:spPr/>
-        <p:txBody>
-          <a:bodyPr/>
-          <a:lstStyle/>
-          <a:p>
-            <a:r>
-              <a:t>The Blood Bank and Donor Management System helps connect blood donors with patients quickly and efficiently.</a:t>
-            </a:r>
-          </a:p>
-          <a:p>
-            <a:r>
-              <a:t>It simplifies the blood donation process and can help save lives.</a:t>
+              <a:rPr lang="en-IN" dirty="0">
+                <a:solidFill>
+                  <a:srgbClr val="FF0000"/>
+                </a:solidFill>
+              </a:rPr>
+              <a:t>THANK YOU </a:t>
             </a:r>
           </a:p>
         </p:txBody>
@@ -3355,7 +3882,11 @@
           <a:lstStyle/>
           <a:p>
             <a:r>
-              <a:rPr lang="en-IN" dirty="0"/>
+              <a:rPr lang="en-IN" dirty="0">
+                <a:solidFill>
+                  <a:srgbClr val="FF0000"/>
+                </a:solidFill>
+              </a:rPr>
               <a:t>Members</a:t>
             </a:r>
           </a:p>
@@ -4071,36 +4602,293 @@
           <a:lstStyle/>
           <a:p>
             <a:r>
-              <a:rPr dirty="0"/>
-              <a:t>Project Overview</a:t>
-            </a:r>
-          </a:p>
-        </p:txBody>
-      </p:sp>
-      <p:sp>
-        <p:nvSpPr>
-          <p:cNvPr id="3" name="Content Placeholder 2"/>
-          <p:cNvSpPr>
-            <a:spLocks noGrp="1"/>
+              <a:rPr lang="en-IN" dirty="0">
+                <a:solidFill>
+                  <a:srgbClr val="FF0000"/>
+                </a:solidFill>
+              </a:rPr>
+              <a:t>Introduction</a:t>
+            </a:r>
+            <a:endParaRPr dirty="0">
+              <a:solidFill>
+                <a:srgbClr val="FF0000"/>
+              </a:solidFill>
+            </a:endParaRPr>
+          </a:p>
+        </p:txBody>
+      </p:sp>
+      <p:sp>
+        <p:nvSpPr>
+          <p:cNvPr id="5" name="Rectangle 2">
+            <a:extLst>
+              <a:ext uri="{FF2B5EF4-FFF2-40B4-BE49-F238E27FC236}">
+                <a16:creationId xmlns:a16="http://schemas.microsoft.com/office/drawing/2014/main" id="{9B4A18BB-EAF4-20D3-D5F5-EB397FF73A2A}"/>
+              </a:ext>
+            </a:extLst>
+          </p:cNvPr>
+          <p:cNvSpPr>
+            <a:spLocks noGrp="1" noChangeArrowheads="1"/>
           </p:cNvSpPr>
           <p:nvPr>
             <p:ph idx="1"/>
           </p:nvPr>
         </p:nvSpPr>
-        <p:spPr/>
-        <p:txBody>
-          <a:bodyPr/>
+        <p:spPr bwMode="auto">
+          <a:xfrm>
+            <a:off x="457200" y="1890894"/>
+            <a:ext cx="8411497" cy="3847207"/>
+          </a:xfrm>
+          <a:prstGeom prst="rect">
+            <a:avLst/>
+          </a:prstGeom>
+          <a:noFill/>
+          <a:ln>
+            <a:noFill/>
+          </a:ln>
+          <a:effectLst/>
+          <a:extLst>
+            <a:ext uri="{909E8E84-426E-40DD-AFC4-6F175D3DCCD1}">
+              <a14:hiddenFill xmlns:a14="http://schemas.microsoft.com/office/drawing/2010/main">
+                <a:solidFill>
+                  <a:schemeClr val="accent1"/>
+                </a:solidFill>
+              </a14:hiddenFill>
+            </a:ext>
+            <a:ext uri="{91240B29-F687-4F45-9708-019B960494DF}">
+              <a14:hiddenLine xmlns:a14="http://schemas.microsoft.com/office/drawing/2010/main" w="9525">
+                <a:solidFill>
+                  <a:schemeClr val="tx1"/>
+                </a:solidFill>
+                <a:miter lim="800000"/>
+                <a:headEnd/>
+                <a:tailEnd/>
+              </a14:hiddenLine>
+            </a:ext>
+            <a:ext uri="{AF507438-7753-43E0-B8FC-AC1667EBCBE1}">
+              <a14:hiddenEffects xmlns:a14="http://schemas.microsoft.com/office/drawing/2010/main">
+                <a:effectLst>
+                  <a:outerShdw dist="35921" dir="2700000" algn="ctr" rotWithShape="0">
+                    <a:schemeClr val="bg2"/>
+                  </a:outerShdw>
+                </a:effectLst>
+              </a14:hiddenEffects>
+            </a:ext>
+          </a:extLst>
+        </p:spPr>
+        <p:txBody>
+          <a:bodyPr vert="horz" wrap="square" lIns="91440" tIns="45720" rIns="91440" bIns="45720" numCol="1" anchor="ctr" anchorCtr="0" compatLnSpc="1">
+            <a:prstTxWarp prst="textNoShape">
+              <a:avLst/>
+            </a:prstTxWarp>
+            <a:spAutoFit/>
+          </a:bodyPr>
           <a:lstStyle/>
           <a:p>
-            <a:r>
-              <a:rPr dirty="0"/>
-              <a:t>A web-based system that helps patients find blood donors quickly during emergencies.</a:t>
-            </a:r>
-          </a:p>
-          <a:p>
-            <a:r>
-              <a:rPr dirty="0"/>
-              <a:t>The platform allows donors to register and patients to search for available donors.</a:t>
+            <a:pPr marL="0" marR="0" lvl="0" indent="0" algn="l" defTabSz="914400" rtl="0" eaLnBrk="0" fontAlgn="base" latinLnBrk="0" hangingPunct="0">
+              <a:lnSpc>
+                <a:spcPct val="100000"/>
+              </a:lnSpc>
+              <a:spcBef>
+                <a:spcPct val="0"/>
+              </a:spcBef>
+              <a:spcAft>
+                <a:spcPct val="0"/>
+              </a:spcAft>
+              <a:buClrTx/>
+              <a:buSzTx/>
+              <a:buFontTx/>
+              <a:buNone/>
+              <a:tabLst/>
+            </a:pPr>
+            <a:endParaRPr kumimoji="0" lang="en-US" altLang="en-US" sz="2000" b="0" i="0" u="none" strike="noStrike" cap="none" normalizeH="0" baseline="0" dirty="0">
+              <a:ln>
+                <a:noFill/>
+              </a:ln>
+              <a:solidFill>
+                <a:schemeClr val="tx1"/>
+              </a:solidFill>
+              <a:effectLst/>
+              <a:latin typeface="Arial" panose="020B0604020202020204" pitchFamily="34" charset="0"/>
+            </a:endParaRPr>
+          </a:p>
+          <a:p>
+            <a:pPr marL="0" marR="0" lvl="0" indent="0" algn="l" defTabSz="914400" rtl="0" eaLnBrk="0" fontAlgn="base" latinLnBrk="0" hangingPunct="0">
+              <a:lnSpc>
+                <a:spcPct val="100000"/>
+              </a:lnSpc>
+              <a:spcBef>
+                <a:spcPct val="0"/>
+              </a:spcBef>
+              <a:spcAft>
+                <a:spcPct val="0"/>
+              </a:spcAft>
+              <a:buClrTx/>
+              <a:buSzTx/>
+              <a:buFontTx/>
+              <a:buChar char="•"/>
+              <a:tabLst/>
+            </a:pPr>
+            <a:r>
+              <a:rPr kumimoji="0" lang="en-US" altLang="en-US" sz="2800" b="0" i="0" u="none" strike="noStrike" cap="none" normalizeH="0" baseline="0" dirty="0">
+                <a:ln>
+                  <a:noFill/>
+                </a:ln>
+                <a:solidFill>
+                  <a:schemeClr val="tx1"/>
+                </a:solidFill>
+                <a:effectLst/>
+                <a:latin typeface="Arial" panose="020B0604020202020204" pitchFamily="34" charset="0"/>
+              </a:rPr>
+              <a:t>Web-based platform for blood donation management </a:t>
+            </a:r>
+          </a:p>
+          <a:p>
+            <a:pPr marL="0" marR="0" lvl="0" indent="0" algn="l" defTabSz="914400" rtl="0" eaLnBrk="0" fontAlgn="base" latinLnBrk="0" hangingPunct="0">
+              <a:lnSpc>
+                <a:spcPct val="100000"/>
+              </a:lnSpc>
+              <a:spcBef>
+                <a:spcPct val="0"/>
+              </a:spcBef>
+              <a:spcAft>
+                <a:spcPct val="0"/>
+              </a:spcAft>
+              <a:buClrTx/>
+              <a:buSzTx/>
+              <a:buFontTx/>
+              <a:buChar char="•"/>
+              <a:tabLst/>
+            </a:pPr>
+            <a:endParaRPr kumimoji="0" lang="en-US" altLang="en-US" sz="2800" b="0" i="0" u="none" strike="noStrike" cap="none" normalizeH="0" baseline="0" dirty="0">
+              <a:ln>
+                <a:noFill/>
+              </a:ln>
+              <a:solidFill>
+                <a:schemeClr val="tx1"/>
+              </a:solidFill>
+              <a:effectLst/>
+              <a:latin typeface="Arial" panose="020B0604020202020204" pitchFamily="34" charset="0"/>
+            </a:endParaRPr>
+          </a:p>
+          <a:p>
+            <a:pPr marL="0" marR="0" lvl="0" indent="0" algn="l" defTabSz="914400" rtl="0" eaLnBrk="0" fontAlgn="base" latinLnBrk="0" hangingPunct="0">
+              <a:lnSpc>
+                <a:spcPct val="100000"/>
+              </a:lnSpc>
+              <a:spcBef>
+                <a:spcPct val="0"/>
+              </a:spcBef>
+              <a:spcAft>
+                <a:spcPct val="0"/>
+              </a:spcAft>
+              <a:buClrTx/>
+              <a:buSzTx/>
+              <a:buFontTx/>
+              <a:buChar char="•"/>
+              <a:tabLst/>
+            </a:pPr>
+            <a:r>
+              <a:rPr kumimoji="0" lang="en-US" altLang="en-US" sz="2800" b="0" i="0" u="none" strike="noStrike" cap="none" normalizeH="0" baseline="0" dirty="0">
+                <a:ln>
+                  <a:noFill/>
+                </a:ln>
+                <a:solidFill>
+                  <a:schemeClr val="tx1"/>
+                </a:solidFill>
+                <a:effectLst/>
+                <a:latin typeface="Arial" panose="020B0604020202020204" pitchFamily="34" charset="0"/>
+              </a:rPr>
+              <a:t>Connects donors, patients, and hospitals </a:t>
+            </a:r>
+          </a:p>
+          <a:p>
+            <a:pPr marL="0" marR="0" lvl="0" indent="0" algn="l" defTabSz="914400" rtl="0" eaLnBrk="0" fontAlgn="base" latinLnBrk="0" hangingPunct="0">
+              <a:lnSpc>
+                <a:spcPct val="100000"/>
+              </a:lnSpc>
+              <a:spcBef>
+                <a:spcPct val="0"/>
+              </a:spcBef>
+              <a:spcAft>
+                <a:spcPct val="0"/>
+              </a:spcAft>
+              <a:buClrTx/>
+              <a:buSzTx/>
+              <a:buFontTx/>
+              <a:buChar char="•"/>
+              <a:tabLst/>
+            </a:pPr>
+            <a:r>
+              <a:rPr kumimoji="0" lang="en-US" altLang="en-US" sz="2800" b="0" i="0" u="none" strike="noStrike" cap="none" normalizeH="0" baseline="0" dirty="0">
+                <a:ln>
+                  <a:noFill/>
+                </a:ln>
+                <a:solidFill>
+                  <a:schemeClr val="tx1"/>
+                </a:solidFill>
+                <a:effectLst/>
+                <a:latin typeface="Arial" panose="020B0604020202020204" pitchFamily="34" charset="0"/>
+              </a:rPr>
+              <a:t>Helps find blood donors quickly during emergencies </a:t>
+            </a:r>
+          </a:p>
+          <a:p>
+            <a:pPr marL="0" marR="0" lvl="0" indent="0" algn="l" defTabSz="914400" rtl="0" eaLnBrk="0" fontAlgn="base" latinLnBrk="0" hangingPunct="0">
+              <a:lnSpc>
+                <a:spcPct val="100000"/>
+              </a:lnSpc>
+              <a:spcBef>
+                <a:spcPct val="0"/>
+              </a:spcBef>
+              <a:spcAft>
+                <a:spcPct val="0"/>
+              </a:spcAft>
+              <a:buClrTx/>
+              <a:buSzTx/>
+              <a:buFontTx/>
+              <a:buChar char="•"/>
+              <a:tabLst/>
+            </a:pPr>
+            <a:endParaRPr kumimoji="0" lang="en-US" altLang="en-US" sz="2800" b="0" i="0" u="none" strike="noStrike" cap="none" normalizeH="0" baseline="0" dirty="0">
+              <a:ln>
+                <a:noFill/>
+              </a:ln>
+              <a:solidFill>
+                <a:schemeClr val="tx1"/>
+              </a:solidFill>
+              <a:effectLst/>
+              <a:latin typeface="Arial" panose="020B0604020202020204" pitchFamily="34" charset="0"/>
+            </a:endParaRPr>
+          </a:p>
+          <a:p>
+            <a:pPr marL="0" marR="0" lvl="0" indent="0" algn="l" defTabSz="914400" rtl="0" eaLnBrk="0" fontAlgn="base" latinLnBrk="0" hangingPunct="0">
+              <a:lnSpc>
+                <a:spcPct val="100000"/>
+              </a:lnSpc>
+              <a:spcBef>
+                <a:spcPct val="0"/>
+              </a:spcBef>
+              <a:spcAft>
+                <a:spcPct val="0"/>
+              </a:spcAft>
+              <a:buClrTx/>
+              <a:buSzTx/>
+              <a:buFontTx/>
+              <a:buChar char="•"/>
+              <a:tabLst/>
+            </a:pPr>
+            <a:r>
+              <a:rPr kumimoji="0" lang="en-US" altLang="en-US" sz="2800" b="0" i="0" u="none" strike="noStrike" cap="none" normalizeH="0" baseline="0" dirty="0">
+                <a:ln>
+                  <a:noFill/>
+                </a:ln>
+                <a:solidFill>
+                  <a:schemeClr val="tx1"/>
+                </a:solidFill>
+                <a:effectLst/>
+                <a:latin typeface="Arial" panose="020B0604020202020204" pitchFamily="34" charset="0"/>
+              </a:rPr>
+              <a:t>Centralized system for storing donor information </a:t>
             </a:r>
           </a:p>
         </p:txBody>
@@ -4132,7 +4920,13 @@
       </p:grpSpPr>
       <p:sp>
         <p:nvSpPr>
-          <p:cNvPr id="2" name="Title 1"/>
+          <p:cNvPr id="2" name="Title 1">
+            <a:extLst>
+              <a:ext uri="{FF2B5EF4-FFF2-40B4-BE49-F238E27FC236}">
+                <a16:creationId xmlns:a16="http://schemas.microsoft.com/office/drawing/2014/main" id="{9E47EB0C-0E1C-BB63-6E96-0A12E39BB9DC}"/>
+              </a:ext>
+            </a:extLst>
+          </p:cNvPr>
           <p:cNvSpPr>
             <a:spLocks noGrp="1"/>
           </p:cNvSpPr>
@@ -4146,52 +4940,328 @@
           <a:lstStyle/>
           <a:p>
             <a:r>
-              <a:t>Objectives</a:t>
-            </a:r>
-          </a:p>
-        </p:txBody>
-      </p:sp>
-      <p:sp>
-        <p:nvSpPr>
-          <p:cNvPr id="3" name="Content Placeholder 2"/>
-          <p:cNvSpPr>
-            <a:spLocks noGrp="1"/>
+              <a:rPr lang="en-IN" dirty="0">
+                <a:solidFill>
+                  <a:srgbClr val="FF0000"/>
+                </a:solidFill>
+              </a:rPr>
+              <a:t>Problem Statement</a:t>
+            </a:r>
+          </a:p>
+        </p:txBody>
+      </p:sp>
+      <p:sp>
+        <p:nvSpPr>
+          <p:cNvPr id="4" name="Rectangle 1">
+            <a:extLst>
+              <a:ext uri="{FF2B5EF4-FFF2-40B4-BE49-F238E27FC236}">
+                <a16:creationId xmlns:a16="http://schemas.microsoft.com/office/drawing/2014/main" id="{62D011BB-9DFF-E17A-5836-17078C5EA492}"/>
+              </a:ext>
+            </a:extLst>
+          </p:cNvPr>
+          <p:cNvSpPr>
+            <a:spLocks noGrp="1" noChangeArrowheads="1"/>
           </p:cNvSpPr>
           <p:nvPr>
             <p:ph idx="1"/>
           </p:nvPr>
         </p:nvSpPr>
-        <p:spPr/>
-        <p:txBody>
-          <a:bodyPr/>
+        <p:spPr bwMode="auto">
+          <a:xfrm>
+            <a:off x="457200" y="2170412"/>
+            <a:ext cx="8446543" cy="3385542"/>
+          </a:xfrm>
+          <a:prstGeom prst="rect">
+            <a:avLst/>
+          </a:prstGeom>
+          <a:noFill/>
+          <a:ln>
+            <a:noFill/>
+          </a:ln>
+          <a:effectLst/>
+          <a:extLst>
+            <a:ext uri="{909E8E84-426E-40DD-AFC4-6F175D3DCCD1}">
+              <a14:hiddenFill xmlns:a14="http://schemas.microsoft.com/office/drawing/2010/main">
+                <a:solidFill>
+                  <a:schemeClr val="accent1"/>
+                </a:solidFill>
+              </a14:hiddenFill>
+            </a:ext>
+            <a:ext uri="{91240B29-F687-4F45-9708-019B960494DF}">
+              <a14:hiddenLine xmlns:a14="http://schemas.microsoft.com/office/drawing/2010/main" w="9525">
+                <a:solidFill>
+                  <a:schemeClr val="tx1"/>
+                </a:solidFill>
+                <a:miter lim="800000"/>
+                <a:headEnd/>
+                <a:tailEnd/>
+              </a14:hiddenLine>
+            </a:ext>
+            <a:ext uri="{AF507438-7753-43E0-B8FC-AC1667EBCBE1}">
+              <a14:hiddenEffects xmlns:a14="http://schemas.microsoft.com/office/drawing/2010/main">
+                <a:effectLst>
+                  <a:outerShdw dist="35921" dir="2700000" algn="ctr" rotWithShape="0">
+                    <a:schemeClr val="bg2"/>
+                  </a:outerShdw>
+                </a:effectLst>
+              </a14:hiddenEffects>
+            </a:ext>
+          </a:extLst>
+        </p:spPr>
+        <p:txBody>
+          <a:bodyPr vert="horz" wrap="none" lIns="91440" tIns="45720" rIns="91440" bIns="45720" numCol="1" anchor="ctr" anchorCtr="0" compatLnSpc="1">
+            <a:prstTxWarp prst="textNoShape">
+              <a:avLst/>
+            </a:prstTxWarp>
+            <a:spAutoFit/>
+          </a:bodyPr>
           <a:lstStyle/>
           <a:p>
-            <a:r>
-              <a:rPr dirty="0"/>
-              <a:t>Provide quick access to blood donors</a:t>
-            </a:r>
-          </a:p>
-          <a:p>
-            <a:r>
-              <a:rPr dirty="0"/>
-              <a:t>Maintain a donor database</a:t>
-            </a:r>
-          </a:p>
-          <a:p>
-            <a:r>
-              <a:rPr dirty="0"/>
-              <a:t>Allow hospitals/patients to request blood</a:t>
-            </a:r>
-          </a:p>
-          <a:p>
-            <a:r>
-              <a:rPr dirty="0"/>
-              <a:t>Improve communication between donors and patients</a:t>
+            <a:pPr marL="0" marR="0" lvl="0" indent="0" algn="l" defTabSz="914400" rtl="0" eaLnBrk="0" fontAlgn="base" latinLnBrk="0" hangingPunct="0">
+              <a:lnSpc>
+                <a:spcPct val="100000"/>
+              </a:lnSpc>
+              <a:spcBef>
+                <a:spcPct val="0"/>
+              </a:spcBef>
+              <a:spcAft>
+                <a:spcPct val="0"/>
+              </a:spcAft>
+              <a:buClrTx/>
+              <a:buSzTx/>
+              <a:buFontTx/>
+              <a:buNone/>
+              <a:tabLst/>
+            </a:pPr>
+            <a:endParaRPr kumimoji="0" lang="en-US" altLang="en-US" sz="1800" b="0" i="0" u="none" strike="noStrike" cap="none" normalizeH="0" baseline="0" dirty="0">
+              <a:ln>
+                <a:noFill/>
+              </a:ln>
+              <a:solidFill>
+                <a:schemeClr val="tx1"/>
+              </a:solidFill>
+              <a:effectLst/>
+              <a:latin typeface="Arial" panose="020B0604020202020204" pitchFamily="34" charset="0"/>
+            </a:endParaRPr>
+          </a:p>
+          <a:p>
+            <a:pPr marL="0" marR="0" lvl="0" indent="0" algn="l" defTabSz="914400" rtl="0" eaLnBrk="0" fontAlgn="base" latinLnBrk="0" hangingPunct="0">
+              <a:lnSpc>
+                <a:spcPct val="100000"/>
+              </a:lnSpc>
+              <a:spcBef>
+                <a:spcPct val="0"/>
+              </a:spcBef>
+              <a:spcAft>
+                <a:spcPct val="0"/>
+              </a:spcAft>
+              <a:buClrTx/>
+              <a:buSzTx/>
+              <a:buFontTx/>
+              <a:buChar char="•"/>
+              <a:tabLst/>
+            </a:pPr>
+            <a:r>
+              <a:rPr kumimoji="0" lang="en-US" altLang="en-US" sz="2800" b="0" i="0" u="none" strike="noStrike" cap="none" normalizeH="0" baseline="0" dirty="0">
+                <a:ln>
+                  <a:noFill/>
+                </a:ln>
+                <a:solidFill>
+                  <a:schemeClr val="tx1"/>
+                </a:solidFill>
+                <a:effectLst/>
+                <a:latin typeface="Arial" panose="020B0604020202020204" pitchFamily="34" charset="0"/>
+              </a:rPr>
+              <a:t>Difficulty finding donors in emergency situations</a:t>
+            </a:r>
+          </a:p>
+          <a:p>
+            <a:pPr marL="0" marR="0" lvl="0" indent="0" algn="l" defTabSz="914400" rtl="0" eaLnBrk="0" fontAlgn="base" latinLnBrk="0" hangingPunct="0">
+              <a:lnSpc>
+                <a:spcPct val="100000"/>
+              </a:lnSpc>
+              <a:spcBef>
+                <a:spcPct val="0"/>
+              </a:spcBef>
+              <a:spcAft>
+                <a:spcPct val="0"/>
+              </a:spcAft>
+              <a:buClrTx/>
+              <a:buSzTx/>
+              <a:buNone/>
+              <a:tabLst/>
+            </a:pPr>
+            <a:r>
+              <a:rPr kumimoji="0" lang="en-US" altLang="en-US" sz="2800" b="0" i="0" u="none" strike="noStrike" cap="none" normalizeH="0" baseline="0" dirty="0">
+                <a:ln>
+                  <a:noFill/>
+                </a:ln>
+                <a:solidFill>
+                  <a:schemeClr val="tx1"/>
+                </a:solidFill>
+                <a:effectLst/>
+                <a:latin typeface="Arial" panose="020B0604020202020204" pitchFamily="34" charset="0"/>
+              </a:rPr>
+              <a:t> </a:t>
+            </a:r>
+          </a:p>
+          <a:p>
+            <a:pPr marL="0" marR="0" lvl="0" indent="0" algn="l" defTabSz="914400" rtl="0" eaLnBrk="0" fontAlgn="base" latinLnBrk="0" hangingPunct="0">
+              <a:lnSpc>
+                <a:spcPct val="100000"/>
+              </a:lnSpc>
+              <a:spcBef>
+                <a:spcPct val="0"/>
+              </a:spcBef>
+              <a:spcAft>
+                <a:spcPct val="0"/>
+              </a:spcAft>
+              <a:buClrTx/>
+              <a:buSzTx/>
+              <a:buFontTx/>
+              <a:buChar char="•"/>
+              <a:tabLst/>
+            </a:pPr>
+            <a:r>
+              <a:rPr kumimoji="0" lang="en-US" altLang="en-US" sz="2800" b="0" i="0" u="none" strike="noStrike" cap="none" normalizeH="0" baseline="0" dirty="0">
+                <a:ln>
+                  <a:noFill/>
+                </a:ln>
+                <a:solidFill>
+                  <a:schemeClr val="tx1"/>
+                </a:solidFill>
+                <a:effectLst/>
+                <a:latin typeface="Arial" panose="020B0604020202020204" pitchFamily="34" charset="0"/>
+              </a:rPr>
+              <a:t>No centralized donor database </a:t>
+            </a:r>
+          </a:p>
+          <a:p>
+            <a:pPr marL="0" marR="0" lvl="0" indent="0" algn="l" defTabSz="914400" rtl="0" eaLnBrk="0" fontAlgn="base" latinLnBrk="0" hangingPunct="0">
+              <a:lnSpc>
+                <a:spcPct val="100000"/>
+              </a:lnSpc>
+              <a:spcBef>
+                <a:spcPct val="0"/>
+              </a:spcBef>
+              <a:spcAft>
+                <a:spcPct val="0"/>
+              </a:spcAft>
+              <a:buClrTx/>
+              <a:buSzTx/>
+              <a:buFontTx/>
+              <a:buChar char="•"/>
+              <a:tabLst/>
+            </a:pPr>
+            <a:endParaRPr kumimoji="0" lang="en-US" altLang="en-US" sz="2800" b="0" i="0" u="none" strike="noStrike" cap="none" normalizeH="0" baseline="0" dirty="0">
+              <a:ln>
+                <a:noFill/>
+              </a:ln>
+              <a:solidFill>
+                <a:schemeClr val="tx1"/>
+              </a:solidFill>
+              <a:effectLst/>
+              <a:latin typeface="Arial" panose="020B0604020202020204" pitchFamily="34" charset="0"/>
+            </a:endParaRPr>
+          </a:p>
+          <a:p>
+            <a:pPr marL="0" marR="0" lvl="0" indent="0" algn="l" defTabSz="914400" rtl="0" eaLnBrk="0" fontAlgn="base" latinLnBrk="0" hangingPunct="0">
+              <a:lnSpc>
+                <a:spcPct val="100000"/>
+              </a:lnSpc>
+              <a:spcBef>
+                <a:spcPct val="0"/>
+              </a:spcBef>
+              <a:spcAft>
+                <a:spcPct val="0"/>
+              </a:spcAft>
+              <a:buClrTx/>
+              <a:buSzTx/>
+              <a:buFontTx/>
+              <a:buChar char="•"/>
+              <a:tabLst/>
+            </a:pPr>
+            <a:r>
+              <a:rPr kumimoji="0" lang="en-US" altLang="en-US" sz="2800" b="0" i="0" u="none" strike="noStrike" cap="none" normalizeH="0" baseline="0" dirty="0">
+                <a:ln>
+                  <a:noFill/>
+                </a:ln>
+                <a:solidFill>
+                  <a:schemeClr val="tx1"/>
+                </a:solidFill>
+                <a:effectLst/>
+                <a:latin typeface="Arial" panose="020B0604020202020204" pitchFamily="34" charset="0"/>
+              </a:rPr>
+              <a:t>Time-consuming manual search process </a:t>
+            </a:r>
+          </a:p>
+          <a:p>
+            <a:pPr marL="0" marR="0" lvl="0" indent="0" algn="l" defTabSz="914400" rtl="0" eaLnBrk="0" fontAlgn="base" latinLnBrk="0" hangingPunct="0">
+              <a:lnSpc>
+                <a:spcPct val="100000"/>
+              </a:lnSpc>
+              <a:spcBef>
+                <a:spcPct val="0"/>
+              </a:spcBef>
+              <a:spcAft>
+                <a:spcPct val="0"/>
+              </a:spcAft>
+              <a:buClrTx/>
+              <a:buSzTx/>
+              <a:buFontTx/>
+              <a:buChar char="•"/>
+              <a:tabLst/>
+            </a:pPr>
+            <a:endParaRPr kumimoji="0" lang="en-US" altLang="en-US" sz="2800" b="0" i="0" u="none" strike="noStrike" cap="none" normalizeH="0" baseline="0" dirty="0">
+              <a:ln>
+                <a:noFill/>
+              </a:ln>
+              <a:solidFill>
+                <a:schemeClr val="tx1"/>
+              </a:solidFill>
+              <a:effectLst/>
+              <a:latin typeface="Arial" panose="020B0604020202020204" pitchFamily="34" charset="0"/>
+            </a:endParaRPr>
+          </a:p>
+          <a:p>
+            <a:pPr marL="0" marR="0" lvl="0" indent="0" algn="l" defTabSz="914400" rtl="0" eaLnBrk="0" fontAlgn="base" latinLnBrk="0" hangingPunct="0">
+              <a:lnSpc>
+                <a:spcPct val="100000"/>
+              </a:lnSpc>
+              <a:spcBef>
+                <a:spcPct val="0"/>
+              </a:spcBef>
+              <a:spcAft>
+                <a:spcPct val="0"/>
+              </a:spcAft>
+              <a:buClrTx/>
+              <a:buSzTx/>
+              <a:buFontTx/>
+              <a:buChar char="•"/>
+              <a:tabLst/>
+            </a:pPr>
+            <a:r>
+              <a:rPr kumimoji="0" lang="en-US" altLang="en-US" sz="2800" b="0" i="0" u="none" strike="noStrike" cap="none" normalizeH="0" baseline="0" dirty="0">
+                <a:ln>
+                  <a:noFill/>
+                </a:ln>
+                <a:solidFill>
+                  <a:schemeClr val="tx1"/>
+                </a:solidFill>
+                <a:effectLst/>
+                <a:latin typeface="Arial" panose="020B0604020202020204" pitchFamily="34" charset="0"/>
+              </a:rPr>
+              <a:t>Lack of communication between donors &amp; patients </a:t>
             </a:r>
           </a:p>
         </p:txBody>
       </p:sp>
     </p:spTree>
+    <p:extLst>
+      <p:ext uri="{BB962C8B-B14F-4D97-AF65-F5344CB8AC3E}">
+        <p14:creationId xmlns:p14="http://schemas.microsoft.com/office/powerpoint/2010/main" val="3661476830"/>
+      </p:ext>
+    </p:extLst>
   </p:cSld>
   <p:clrMapOvr>
     <a:masterClrMapping/>
@@ -4232,47 +5302,379 @@
           <a:lstStyle/>
           <a:p>
             <a:r>
-              <a:t>Technologies Used</a:t>
-            </a:r>
-          </a:p>
-        </p:txBody>
-      </p:sp>
-      <p:sp>
-        <p:nvSpPr>
-          <p:cNvPr id="3" name="Content Placeholder 2"/>
-          <p:cNvSpPr>
-            <a:spLocks noGrp="1"/>
+              <a:rPr dirty="0">
+                <a:solidFill>
+                  <a:srgbClr val="FF0000"/>
+                </a:solidFill>
+              </a:rPr>
+              <a:t>Objectives</a:t>
+            </a:r>
+          </a:p>
+        </p:txBody>
+      </p:sp>
+      <p:sp>
+        <p:nvSpPr>
+          <p:cNvPr id="5" name="Rectangle 2">
+            <a:extLst>
+              <a:ext uri="{FF2B5EF4-FFF2-40B4-BE49-F238E27FC236}">
+                <a16:creationId xmlns:a16="http://schemas.microsoft.com/office/drawing/2014/main" id="{5A98269A-E594-5EC4-162E-BF37E014031C}"/>
+              </a:ext>
+            </a:extLst>
+          </p:cNvPr>
+          <p:cNvSpPr>
+            <a:spLocks noGrp="1" noChangeArrowheads="1"/>
           </p:cNvSpPr>
           <p:nvPr>
             <p:ph idx="1"/>
           </p:nvPr>
         </p:nvSpPr>
-        <p:spPr/>
-        <p:txBody>
-          <a:bodyPr/>
+        <p:spPr bwMode="auto">
+          <a:xfrm>
+            <a:off x="673510" y="1197055"/>
+            <a:ext cx="7455887" cy="4801314"/>
+          </a:xfrm>
+          <a:prstGeom prst="rect">
+            <a:avLst/>
+          </a:prstGeom>
+          <a:noFill/>
+          <a:ln>
+            <a:noFill/>
+          </a:ln>
+          <a:effectLst/>
+          <a:extLst>
+            <a:ext uri="{909E8E84-426E-40DD-AFC4-6F175D3DCCD1}">
+              <a14:hiddenFill xmlns:a14="http://schemas.microsoft.com/office/drawing/2010/main">
+                <a:solidFill>
+                  <a:schemeClr val="accent1"/>
+                </a:solidFill>
+              </a14:hiddenFill>
+            </a:ext>
+            <a:ext uri="{91240B29-F687-4F45-9708-019B960494DF}">
+              <a14:hiddenLine xmlns:a14="http://schemas.microsoft.com/office/drawing/2010/main" w="9525">
+                <a:solidFill>
+                  <a:schemeClr val="tx1"/>
+                </a:solidFill>
+                <a:miter lim="800000"/>
+                <a:headEnd/>
+                <a:tailEnd/>
+              </a14:hiddenLine>
+            </a:ext>
+            <a:ext uri="{AF507438-7753-43E0-B8FC-AC1667EBCBE1}">
+              <a14:hiddenEffects xmlns:a14="http://schemas.microsoft.com/office/drawing/2010/main">
+                <a:effectLst>
+                  <a:outerShdw dist="35921" dir="2700000" algn="ctr" rotWithShape="0">
+                    <a:schemeClr val="bg2"/>
+                  </a:outerShdw>
+                </a:effectLst>
+              </a14:hiddenEffects>
+            </a:ext>
+          </a:extLst>
+        </p:spPr>
+        <p:txBody>
+          <a:bodyPr vert="horz" wrap="none" lIns="91440" tIns="45720" rIns="91440" bIns="45720" numCol="1" anchor="ctr" anchorCtr="0" compatLnSpc="1">
+            <a:prstTxWarp prst="textNoShape">
+              <a:avLst/>
+            </a:prstTxWarp>
+            <a:spAutoFit/>
+          </a:bodyPr>
           <a:lstStyle/>
           <a:p>
-            <a:r>
-              <a:rPr dirty="0"/>
-              <a:t>Frontend: HTML, CSS</a:t>
-            </a:r>
-          </a:p>
-          <a:p>
-            <a:r>
-              <a:rPr dirty="0"/>
-              <a:t>Backend: PHP</a:t>
-            </a:r>
-          </a:p>
-          <a:p>
-            <a:r>
-              <a:rPr dirty="0"/>
-              <a:t>Database: MySQL</a:t>
-            </a:r>
-          </a:p>
-          <a:p>
-            <a:r>
-              <a:rPr dirty="0"/>
-              <a:t>Server: XAMPP</a:t>
+            <a:pPr marL="0" marR="0" lvl="0" indent="0" algn="l" defTabSz="914400" rtl="0" eaLnBrk="0" fontAlgn="base" latinLnBrk="0" hangingPunct="0">
+              <a:lnSpc>
+                <a:spcPct val="100000"/>
+              </a:lnSpc>
+              <a:spcBef>
+                <a:spcPct val="0"/>
+              </a:spcBef>
+              <a:spcAft>
+                <a:spcPct val="0"/>
+              </a:spcAft>
+              <a:buClrTx/>
+              <a:buSzTx/>
+              <a:buFontTx/>
+              <a:buNone/>
+              <a:tabLst/>
+            </a:pPr>
+            <a:endParaRPr kumimoji="0" lang="en-US" altLang="en-US" sz="1800" b="0" i="0" u="none" strike="noStrike" cap="none" normalizeH="0" baseline="0" dirty="0">
+              <a:ln>
+                <a:noFill/>
+              </a:ln>
+              <a:solidFill>
+                <a:schemeClr val="tx1"/>
+              </a:solidFill>
+              <a:effectLst/>
+              <a:latin typeface="Arial" panose="020B0604020202020204" pitchFamily="34" charset="0"/>
+            </a:endParaRPr>
+          </a:p>
+          <a:p>
+            <a:pPr marL="0" marR="0" lvl="0" indent="0" algn="l" defTabSz="914400" rtl="0" eaLnBrk="0" fontAlgn="base" latinLnBrk="0" hangingPunct="0">
+              <a:lnSpc>
+                <a:spcPct val="100000"/>
+              </a:lnSpc>
+              <a:spcBef>
+                <a:spcPct val="0"/>
+              </a:spcBef>
+              <a:spcAft>
+                <a:spcPct val="0"/>
+              </a:spcAft>
+              <a:buClrTx/>
+              <a:buSzTx/>
+              <a:buFontTx/>
+              <a:buChar char="•"/>
+              <a:tabLst/>
+            </a:pPr>
+            <a:r>
+              <a:rPr kumimoji="0" lang="en-US" altLang="en-US" b="0" i="0" u="none" strike="noStrike" cap="none" normalizeH="0" baseline="0" dirty="0">
+                <a:ln>
+                  <a:noFill/>
+                </a:ln>
+                <a:solidFill>
+                  <a:schemeClr val="tx1"/>
+                </a:solidFill>
+                <a:effectLst/>
+                <a:latin typeface="Arial" panose="020B0604020202020204" pitchFamily="34" charset="0"/>
+              </a:rPr>
+              <a:t>Provide quick access to blood donors</a:t>
+            </a:r>
+          </a:p>
+          <a:p>
+            <a:pPr marL="0" marR="0" lvl="0" indent="0" algn="l" defTabSz="914400" rtl="0" eaLnBrk="0" fontAlgn="base" latinLnBrk="0" hangingPunct="0">
+              <a:lnSpc>
+                <a:spcPct val="100000"/>
+              </a:lnSpc>
+              <a:spcBef>
+                <a:spcPct val="0"/>
+              </a:spcBef>
+              <a:spcAft>
+                <a:spcPct val="0"/>
+              </a:spcAft>
+              <a:buClrTx/>
+              <a:buSzTx/>
+              <a:buNone/>
+              <a:tabLst/>
+            </a:pPr>
+            <a:r>
+              <a:rPr kumimoji="0" lang="en-US" altLang="en-US" b="0" i="0" u="none" strike="noStrike" cap="none" normalizeH="0" baseline="0" dirty="0">
+                <a:ln>
+                  <a:noFill/>
+                </a:ln>
+                <a:solidFill>
+                  <a:schemeClr val="tx1"/>
+                </a:solidFill>
+                <a:effectLst/>
+                <a:latin typeface="Arial" panose="020B0604020202020204" pitchFamily="34" charset="0"/>
+              </a:rPr>
+              <a:t> </a:t>
+            </a:r>
+          </a:p>
+          <a:p>
+            <a:pPr marL="0" marR="0" lvl="0" indent="0" algn="l" defTabSz="914400" rtl="0" eaLnBrk="0" fontAlgn="base" latinLnBrk="0" hangingPunct="0">
+              <a:lnSpc>
+                <a:spcPct val="100000"/>
+              </a:lnSpc>
+              <a:spcBef>
+                <a:spcPct val="0"/>
+              </a:spcBef>
+              <a:spcAft>
+                <a:spcPct val="0"/>
+              </a:spcAft>
+              <a:buClrTx/>
+              <a:buSzTx/>
+              <a:buFontTx/>
+              <a:buChar char="•"/>
+              <a:tabLst/>
+            </a:pPr>
+            <a:r>
+              <a:rPr kumimoji="0" lang="en-US" altLang="en-US" b="0" i="0" u="none" strike="noStrike" cap="none" normalizeH="0" baseline="0" dirty="0">
+                <a:ln>
+                  <a:noFill/>
+                </a:ln>
+                <a:solidFill>
+                  <a:schemeClr val="tx1"/>
+                </a:solidFill>
+                <a:effectLst/>
+                <a:latin typeface="Arial" panose="020B0604020202020204" pitchFamily="34" charset="0"/>
+              </a:rPr>
+              <a:t>Maintain organized donor database </a:t>
+            </a:r>
+          </a:p>
+          <a:p>
+            <a:pPr marL="0" marR="0" lvl="0" indent="0" algn="l" defTabSz="914400" rtl="0" eaLnBrk="0" fontAlgn="base" latinLnBrk="0" hangingPunct="0">
+              <a:lnSpc>
+                <a:spcPct val="100000"/>
+              </a:lnSpc>
+              <a:spcBef>
+                <a:spcPct val="0"/>
+              </a:spcBef>
+              <a:spcAft>
+                <a:spcPct val="0"/>
+              </a:spcAft>
+              <a:buClrTx/>
+              <a:buSzTx/>
+              <a:buFontTx/>
+              <a:buChar char="•"/>
+              <a:tabLst/>
+            </a:pPr>
+            <a:endParaRPr kumimoji="0" lang="en-US" altLang="en-US" b="0" i="0" u="none" strike="noStrike" cap="none" normalizeH="0" baseline="0" dirty="0">
+              <a:ln>
+                <a:noFill/>
+              </a:ln>
+              <a:solidFill>
+                <a:schemeClr val="tx1"/>
+              </a:solidFill>
+              <a:effectLst/>
+              <a:latin typeface="Arial" panose="020B0604020202020204" pitchFamily="34" charset="0"/>
+            </a:endParaRPr>
+          </a:p>
+          <a:p>
+            <a:pPr marL="0" marR="0" lvl="0" indent="0" algn="l" defTabSz="914400" rtl="0" eaLnBrk="0" fontAlgn="base" latinLnBrk="0" hangingPunct="0">
+              <a:lnSpc>
+                <a:spcPct val="100000"/>
+              </a:lnSpc>
+              <a:spcBef>
+                <a:spcPct val="0"/>
+              </a:spcBef>
+              <a:spcAft>
+                <a:spcPct val="0"/>
+              </a:spcAft>
+              <a:buClrTx/>
+              <a:buSzTx/>
+              <a:buFontTx/>
+              <a:buChar char="•"/>
+              <a:tabLst/>
+            </a:pPr>
+            <a:r>
+              <a:rPr kumimoji="0" lang="en-US" altLang="en-US" b="0" i="0" u="none" strike="noStrike" cap="none" normalizeH="0" baseline="0" dirty="0">
+                <a:ln>
+                  <a:noFill/>
+                </a:ln>
+                <a:solidFill>
+                  <a:schemeClr val="tx1"/>
+                </a:solidFill>
+                <a:effectLst/>
+                <a:latin typeface="Arial" panose="020B0604020202020204" pitchFamily="34" charset="0"/>
+              </a:rPr>
+              <a:t>Enable blood request submission </a:t>
+            </a:r>
+          </a:p>
+          <a:p>
+            <a:pPr marL="0" marR="0" lvl="0" indent="0" algn="l" defTabSz="914400" rtl="0" eaLnBrk="0" fontAlgn="base" latinLnBrk="0" hangingPunct="0">
+              <a:lnSpc>
+                <a:spcPct val="100000"/>
+              </a:lnSpc>
+              <a:spcBef>
+                <a:spcPct val="0"/>
+              </a:spcBef>
+              <a:spcAft>
+                <a:spcPct val="0"/>
+              </a:spcAft>
+              <a:buClrTx/>
+              <a:buSzTx/>
+              <a:buFontTx/>
+              <a:buChar char="•"/>
+              <a:tabLst/>
+            </a:pPr>
+            <a:endParaRPr kumimoji="0" lang="en-US" altLang="en-US" b="0" i="0" u="none" strike="noStrike" cap="none" normalizeH="0" baseline="0" dirty="0">
+              <a:ln>
+                <a:noFill/>
+              </a:ln>
+              <a:solidFill>
+                <a:schemeClr val="tx1"/>
+              </a:solidFill>
+              <a:effectLst/>
+              <a:latin typeface="Arial" panose="020B0604020202020204" pitchFamily="34" charset="0"/>
+            </a:endParaRPr>
+          </a:p>
+          <a:p>
+            <a:pPr marL="0" marR="0" lvl="0" indent="0" algn="l" defTabSz="914400" rtl="0" eaLnBrk="0" fontAlgn="base" latinLnBrk="0" hangingPunct="0">
+              <a:lnSpc>
+                <a:spcPct val="100000"/>
+              </a:lnSpc>
+              <a:spcBef>
+                <a:spcPct val="0"/>
+              </a:spcBef>
+              <a:spcAft>
+                <a:spcPct val="0"/>
+              </a:spcAft>
+              <a:buClrTx/>
+              <a:buSzTx/>
+              <a:buFontTx/>
+              <a:buChar char="•"/>
+              <a:tabLst/>
+            </a:pPr>
+            <a:r>
+              <a:rPr kumimoji="0" lang="en-US" altLang="en-US" b="0" i="0" u="none" strike="noStrike" cap="none" normalizeH="0" baseline="0" dirty="0">
+                <a:ln>
+                  <a:noFill/>
+                </a:ln>
+                <a:solidFill>
+                  <a:schemeClr val="tx1"/>
+                </a:solidFill>
+                <a:effectLst/>
+                <a:latin typeface="Arial" panose="020B0604020202020204" pitchFamily="34" charset="0"/>
+              </a:rPr>
+              <a:t>Improve communication between users</a:t>
+            </a:r>
+          </a:p>
+          <a:p>
+            <a:pPr marL="0" marR="0" lvl="0" indent="0" algn="l" defTabSz="914400" rtl="0" eaLnBrk="0" fontAlgn="base" latinLnBrk="0" hangingPunct="0">
+              <a:lnSpc>
+                <a:spcPct val="100000"/>
+              </a:lnSpc>
+              <a:spcBef>
+                <a:spcPct val="0"/>
+              </a:spcBef>
+              <a:spcAft>
+                <a:spcPct val="0"/>
+              </a:spcAft>
+              <a:buClrTx/>
+              <a:buSzTx/>
+              <a:buNone/>
+              <a:tabLst/>
+            </a:pPr>
+            <a:r>
+              <a:rPr kumimoji="0" lang="en-US" altLang="en-US" b="0" i="0" u="none" strike="noStrike" cap="none" normalizeH="0" baseline="0" dirty="0">
+                <a:ln>
+                  <a:noFill/>
+                </a:ln>
+                <a:solidFill>
+                  <a:schemeClr val="tx1"/>
+                </a:solidFill>
+                <a:effectLst/>
+                <a:latin typeface="Arial" panose="020B0604020202020204" pitchFamily="34" charset="0"/>
+              </a:rPr>
+              <a:t> </a:t>
+            </a:r>
+          </a:p>
+          <a:p>
+            <a:pPr marL="0" marR="0" lvl="0" indent="0" algn="l" defTabSz="914400" rtl="0" eaLnBrk="0" fontAlgn="base" latinLnBrk="0" hangingPunct="0">
+              <a:lnSpc>
+                <a:spcPct val="100000"/>
+              </a:lnSpc>
+              <a:spcBef>
+                <a:spcPct val="0"/>
+              </a:spcBef>
+              <a:spcAft>
+                <a:spcPct val="0"/>
+              </a:spcAft>
+              <a:buClrTx/>
+              <a:buSzTx/>
+              <a:buFontTx/>
+              <a:buChar char="•"/>
+              <a:tabLst/>
+            </a:pPr>
+            <a:r>
+              <a:rPr kumimoji="0" lang="en-US" altLang="en-US" b="0" i="0" u="none" strike="noStrike" cap="none" normalizeH="0" baseline="0" dirty="0">
+                <a:ln>
+                  <a:noFill/>
+                </a:ln>
+                <a:solidFill>
+                  <a:schemeClr val="tx1"/>
+                </a:solidFill>
+                <a:effectLst/>
+                <a:latin typeface="Arial" panose="020B0604020202020204" pitchFamily="34" charset="0"/>
+              </a:rPr>
+              <a:t>Reduce response time in emergencies </a:t>
             </a:r>
           </a:p>
         </p:txBody>
@@ -4304,7 +5706,13 @@
       </p:grpSpPr>
       <p:sp>
         <p:nvSpPr>
-          <p:cNvPr id="2" name="Title 1"/>
+          <p:cNvPr id="2" name="Title 1">
+            <a:extLst>
+              <a:ext uri="{FF2B5EF4-FFF2-40B4-BE49-F238E27FC236}">
+                <a16:creationId xmlns:a16="http://schemas.microsoft.com/office/drawing/2014/main" id="{01C65887-98D3-6F99-BB7D-55C64DBEB912}"/>
+              </a:ext>
+            </a:extLst>
+          </p:cNvPr>
           <p:cNvSpPr>
             <a:spLocks noGrp="1"/>
           </p:cNvSpPr>
@@ -4318,59 +5726,397 @@
           <a:lstStyle/>
           <a:p>
             <a:r>
-              <a:t>System Features</a:t>
-            </a:r>
-          </a:p>
-        </p:txBody>
-      </p:sp>
-      <p:sp>
-        <p:nvSpPr>
-          <p:cNvPr id="3" name="Content Placeholder 2"/>
-          <p:cNvSpPr>
-            <a:spLocks noGrp="1"/>
+              <a:rPr lang="en-IN" dirty="0">
+                <a:solidFill>
+                  <a:srgbClr val="FF0000"/>
+                </a:solidFill>
+              </a:rPr>
+              <a:t>Proposed</a:t>
+            </a:r>
+            <a:r>
+              <a:rPr lang="en-IN" dirty="0"/>
+              <a:t> </a:t>
+            </a:r>
+            <a:r>
+              <a:rPr lang="en-IN" dirty="0">
+                <a:solidFill>
+                  <a:srgbClr val="FF0000"/>
+                </a:solidFill>
+              </a:rPr>
+              <a:t>System</a:t>
+            </a:r>
+          </a:p>
+        </p:txBody>
+      </p:sp>
+      <p:sp>
+        <p:nvSpPr>
+          <p:cNvPr id="4" name="Rectangle 1">
+            <a:extLst>
+              <a:ext uri="{FF2B5EF4-FFF2-40B4-BE49-F238E27FC236}">
+                <a16:creationId xmlns:a16="http://schemas.microsoft.com/office/drawing/2014/main" id="{9A88E776-2D2C-7AFC-B58E-DED2124FC7CF}"/>
+              </a:ext>
+            </a:extLst>
+          </p:cNvPr>
+          <p:cNvSpPr>
+            <a:spLocks noGrp="1" noChangeArrowheads="1"/>
           </p:cNvSpPr>
           <p:nvPr>
             <p:ph idx="1"/>
           </p:nvPr>
         </p:nvSpPr>
-        <p:spPr/>
-        <p:txBody>
-          <a:bodyPr/>
+        <p:spPr bwMode="auto">
+          <a:xfrm>
+            <a:off x="457200" y="1662578"/>
+            <a:ext cx="6909264" cy="4401205"/>
+          </a:xfrm>
+          <a:prstGeom prst="rect">
+            <a:avLst/>
+          </a:prstGeom>
+          <a:noFill/>
+          <a:ln>
+            <a:noFill/>
+          </a:ln>
+          <a:effectLst/>
+          <a:extLst>
+            <a:ext uri="{909E8E84-426E-40DD-AFC4-6F175D3DCCD1}">
+              <a14:hiddenFill xmlns:a14="http://schemas.microsoft.com/office/drawing/2010/main">
+                <a:solidFill>
+                  <a:schemeClr val="accent1"/>
+                </a:solidFill>
+              </a14:hiddenFill>
+            </a:ext>
+            <a:ext uri="{91240B29-F687-4F45-9708-019B960494DF}">
+              <a14:hiddenLine xmlns:a14="http://schemas.microsoft.com/office/drawing/2010/main" w="9525">
+                <a:solidFill>
+                  <a:schemeClr val="tx1"/>
+                </a:solidFill>
+                <a:miter lim="800000"/>
+                <a:headEnd/>
+                <a:tailEnd/>
+              </a14:hiddenLine>
+            </a:ext>
+            <a:ext uri="{AF507438-7753-43E0-B8FC-AC1667EBCBE1}">
+              <a14:hiddenEffects xmlns:a14="http://schemas.microsoft.com/office/drawing/2010/main">
+                <a:effectLst>
+                  <a:outerShdw dist="35921" dir="2700000" algn="ctr" rotWithShape="0">
+                    <a:schemeClr val="bg2"/>
+                  </a:outerShdw>
+                </a:effectLst>
+              </a14:hiddenEffects>
+            </a:ext>
+          </a:extLst>
+        </p:spPr>
+        <p:txBody>
+          <a:bodyPr vert="horz" wrap="none" lIns="91440" tIns="45720" rIns="91440" bIns="45720" numCol="1" anchor="ctr" anchorCtr="0" compatLnSpc="1">
+            <a:prstTxWarp prst="textNoShape">
+              <a:avLst/>
+            </a:prstTxWarp>
+            <a:spAutoFit/>
+          </a:bodyPr>
           <a:lstStyle/>
           <a:p>
-            <a:r>
-              <a:rPr dirty="0"/>
-              <a:t>Donor Registration</a:t>
-            </a:r>
-            <a:endParaRPr lang="en-IN" dirty="0"/>
-          </a:p>
-          <a:p>
-            <a:r>
-              <a:rPr dirty="0"/>
-              <a:t>Search Donor by Blood Group</a:t>
-            </a:r>
-          </a:p>
-          <a:p>
-            <a:r>
-              <a:rPr dirty="0"/>
-              <a:t>Blood Request Form</a:t>
-            </a:r>
-          </a:p>
-          <a:p>
-            <a:r>
-              <a:rPr dirty="0"/>
-              <a:t>Donor List Display</a:t>
-            </a:r>
-          </a:p>
-          <a:p>
-            <a:r>
-              <a:rPr dirty="0"/>
-              <a:t>Admin Panel for management</a:t>
+            <a:pPr marL="0" marR="0" lvl="0" indent="0" algn="l" defTabSz="914400" rtl="0" eaLnBrk="0" fontAlgn="base" latinLnBrk="0" hangingPunct="0">
+              <a:lnSpc>
+                <a:spcPct val="100000"/>
+              </a:lnSpc>
+              <a:spcBef>
+                <a:spcPct val="0"/>
+              </a:spcBef>
+              <a:spcAft>
+                <a:spcPct val="0"/>
+              </a:spcAft>
+              <a:buClrTx/>
+              <a:buSzTx/>
+              <a:buFontTx/>
+              <a:buNone/>
+              <a:tabLst/>
+            </a:pPr>
+            <a:endParaRPr kumimoji="0" lang="en-US" altLang="en-US" sz="2800" b="0" i="0" u="none" strike="noStrike" cap="none" normalizeH="0" baseline="0" dirty="0">
+              <a:ln>
+                <a:noFill/>
+              </a:ln>
+              <a:solidFill>
+                <a:schemeClr val="tx1"/>
+              </a:solidFill>
+              <a:effectLst/>
+              <a:latin typeface="Arial" panose="020B0604020202020204" pitchFamily="34" charset="0"/>
+            </a:endParaRPr>
+          </a:p>
+          <a:p>
+            <a:pPr marL="0" marR="0" lvl="0" indent="0" algn="l" defTabSz="914400" rtl="0" eaLnBrk="0" fontAlgn="base" latinLnBrk="0" hangingPunct="0">
+              <a:lnSpc>
+                <a:spcPct val="100000"/>
+              </a:lnSpc>
+              <a:spcBef>
+                <a:spcPct val="0"/>
+              </a:spcBef>
+              <a:spcAft>
+                <a:spcPct val="0"/>
+              </a:spcAft>
+              <a:buClrTx/>
+              <a:buSzTx/>
+              <a:buFontTx/>
+              <a:buChar char="•"/>
+              <a:tabLst/>
+            </a:pPr>
+            <a:r>
+              <a:rPr kumimoji="0" lang="en-US" altLang="en-US" sz="2800" b="0" i="0" u="none" strike="noStrike" cap="none" normalizeH="0" baseline="0" dirty="0">
+                <a:ln>
+                  <a:noFill/>
+                </a:ln>
+                <a:solidFill>
+                  <a:schemeClr val="tx1"/>
+                </a:solidFill>
+                <a:effectLst/>
+                <a:latin typeface="Arial" panose="020B0604020202020204" pitchFamily="34" charset="0"/>
+              </a:rPr>
+              <a:t>Online donor registration system </a:t>
+            </a:r>
+          </a:p>
+          <a:p>
+            <a:pPr marL="0" marR="0" lvl="0" indent="0" algn="l" defTabSz="914400" rtl="0" eaLnBrk="0" fontAlgn="base" latinLnBrk="0" hangingPunct="0">
+              <a:lnSpc>
+                <a:spcPct val="100000"/>
+              </a:lnSpc>
+              <a:spcBef>
+                <a:spcPct val="0"/>
+              </a:spcBef>
+              <a:spcAft>
+                <a:spcPct val="0"/>
+              </a:spcAft>
+              <a:buClrTx/>
+              <a:buSzTx/>
+              <a:buFontTx/>
+              <a:buChar char="•"/>
+              <a:tabLst/>
+            </a:pPr>
+            <a:endParaRPr kumimoji="0" lang="en-US" altLang="en-US" sz="2800" b="0" i="0" u="none" strike="noStrike" cap="none" normalizeH="0" baseline="0" dirty="0">
+              <a:ln>
+                <a:noFill/>
+              </a:ln>
+              <a:solidFill>
+                <a:schemeClr val="tx1"/>
+              </a:solidFill>
+              <a:effectLst/>
+              <a:latin typeface="Arial" panose="020B0604020202020204" pitchFamily="34" charset="0"/>
+            </a:endParaRPr>
+          </a:p>
+          <a:p>
+            <a:pPr marL="0" marR="0" lvl="0" indent="0" algn="l" defTabSz="914400" rtl="0" eaLnBrk="0" fontAlgn="base" latinLnBrk="0" hangingPunct="0">
+              <a:lnSpc>
+                <a:spcPct val="100000"/>
+              </a:lnSpc>
+              <a:spcBef>
+                <a:spcPct val="0"/>
+              </a:spcBef>
+              <a:spcAft>
+                <a:spcPct val="0"/>
+              </a:spcAft>
+              <a:buClrTx/>
+              <a:buSzTx/>
+              <a:buFontTx/>
+              <a:buChar char="•"/>
+              <a:tabLst/>
+            </a:pPr>
+            <a:r>
+              <a:rPr kumimoji="0" lang="en-US" altLang="en-US" sz="2800" b="0" i="0" u="none" strike="noStrike" cap="none" normalizeH="0" baseline="0" dirty="0">
+                <a:ln>
+                  <a:noFill/>
+                </a:ln>
+                <a:solidFill>
+                  <a:schemeClr val="tx1"/>
+                </a:solidFill>
+                <a:effectLst/>
+                <a:latin typeface="Arial" panose="020B0604020202020204" pitchFamily="34" charset="0"/>
+              </a:rPr>
+              <a:t>Search donors by blood group &amp; location </a:t>
+            </a:r>
+          </a:p>
+          <a:p>
+            <a:pPr marL="0" marR="0" lvl="0" indent="0" algn="l" defTabSz="914400" rtl="0" eaLnBrk="0" fontAlgn="base" latinLnBrk="0" hangingPunct="0">
+              <a:lnSpc>
+                <a:spcPct val="100000"/>
+              </a:lnSpc>
+              <a:spcBef>
+                <a:spcPct val="0"/>
+              </a:spcBef>
+              <a:spcAft>
+                <a:spcPct val="0"/>
+              </a:spcAft>
+              <a:buClrTx/>
+              <a:buSzTx/>
+              <a:buFontTx/>
+              <a:buChar char="•"/>
+              <a:tabLst/>
+            </a:pPr>
+            <a:endParaRPr kumimoji="0" lang="en-US" altLang="en-US" sz="2800" b="0" i="0" u="none" strike="noStrike" cap="none" normalizeH="0" baseline="0" dirty="0">
+              <a:ln>
+                <a:noFill/>
+              </a:ln>
+              <a:solidFill>
+                <a:schemeClr val="tx1"/>
+              </a:solidFill>
+              <a:effectLst/>
+              <a:latin typeface="Arial" panose="020B0604020202020204" pitchFamily="34" charset="0"/>
+            </a:endParaRPr>
+          </a:p>
+          <a:p>
+            <a:pPr marL="0" marR="0" lvl="0" indent="0" algn="l" defTabSz="914400" rtl="0" eaLnBrk="0" fontAlgn="base" latinLnBrk="0" hangingPunct="0">
+              <a:lnSpc>
+                <a:spcPct val="100000"/>
+              </a:lnSpc>
+              <a:spcBef>
+                <a:spcPct val="0"/>
+              </a:spcBef>
+              <a:spcAft>
+                <a:spcPct val="0"/>
+              </a:spcAft>
+              <a:buClrTx/>
+              <a:buSzTx/>
+              <a:buFontTx/>
+              <a:buChar char="•"/>
+              <a:tabLst/>
+            </a:pPr>
+            <a:r>
+              <a:rPr kumimoji="0" lang="en-US" altLang="en-US" sz="2800" b="0" i="0" u="none" strike="noStrike" cap="none" normalizeH="0" baseline="0" dirty="0">
+                <a:ln>
+                  <a:noFill/>
+                </a:ln>
+                <a:solidFill>
+                  <a:schemeClr val="tx1"/>
+                </a:solidFill>
+                <a:effectLst/>
+                <a:latin typeface="Arial" panose="020B0604020202020204" pitchFamily="34" charset="0"/>
+              </a:rPr>
+              <a:t>Submit blood requests easily </a:t>
+            </a:r>
+          </a:p>
+          <a:p>
+            <a:pPr marL="0" marR="0" lvl="0" indent="0" algn="l" defTabSz="914400" rtl="0" eaLnBrk="0" fontAlgn="base" latinLnBrk="0" hangingPunct="0">
+              <a:lnSpc>
+                <a:spcPct val="100000"/>
+              </a:lnSpc>
+              <a:spcBef>
+                <a:spcPct val="0"/>
+              </a:spcBef>
+              <a:spcAft>
+                <a:spcPct val="0"/>
+              </a:spcAft>
+              <a:buClrTx/>
+              <a:buSzTx/>
+              <a:buFontTx/>
+              <a:buChar char="•"/>
+              <a:tabLst/>
+            </a:pPr>
+            <a:endParaRPr kumimoji="0" lang="en-US" altLang="en-US" sz="2800" b="0" i="0" u="none" strike="noStrike" cap="none" normalizeH="0" baseline="0" dirty="0">
+              <a:ln>
+                <a:noFill/>
+              </a:ln>
+              <a:solidFill>
+                <a:schemeClr val="tx1"/>
+              </a:solidFill>
+              <a:effectLst/>
+              <a:latin typeface="Arial" panose="020B0604020202020204" pitchFamily="34" charset="0"/>
+            </a:endParaRPr>
+          </a:p>
+          <a:p>
+            <a:pPr marL="0" marR="0" lvl="0" indent="0" algn="l" defTabSz="914400" rtl="0" eaLnBrk="0" fontAlgn="base" latinLnBrk="0" hangingPunct="0">
+              <a:lnSpc>
+                <a:spcPct val="100000"/>
+              </a:lnSpc>
+              <a:spcBef>
+                <a:spcPct val="0"/>
+              </a:spcBef>
+              <a:spcAft>
+                <a:spcPct val="0"/>
+              </a:spcAft>
+              <a:buClrTx/>
+              <a:buSzTx/>
+              <a:buFontTx/>
+              <a:buChar char="•"/>
+              <a:tabLst/>
+            </a:pPr>
+            <a:r>
+              <a:rPr kumimoji="0" lang="en-US" altLang="en-US" sz="2800" b="0" i="0" u="none" strike="noStrike" cap="none" normalizeH="0" baseline="0" dirty="0">
+                <a:ln>
+                  <a:noFill/>
+                </a:ln>
+                <a:solidFill>
+                  <a:schemeClr val="tx1"/>
+                </a:solidFill>
+                <a:effectLst/>
+                <a:latin typeface="Arial" panose="020B0604020202020204" pitchFamily="34" charset="0"/>
+              </a:rPr>
+              <a:t>Admin manages donors &amp; requests </a:t>
+            </a:r>
+          </a:p>
+          <a:p>
+            <a:pPr marL="0" marR="0" lvl="0" indent="0" algn="l" defTabSz="914400" rtl="0" eaLnBrk="0" fontAlgn="base" latinLnBrk="0" hangingPunct="0">
+              <a:lnSpc>
+                <a:spcPct val="100000"/>
+              </a:lnSpc>
+              <a:spcBef>
+                <a:spcPct val="0"/>
+              </a:spcBef>
+              <a:spcAft>
+                <a:spcPct val="0"/>
+              </a:spcAft>
+              <a:buClrTx/>
+              <a:buSzTx/>
+              <a:buFontTx/>
+              <a:buChar char="•"/>
+              <a:tabLst/>
+            </a:pPr>
+            <a:endParaRPr kumimoji="0" lang="en-US" altLang="en-US" sz="2800" b="0" i="0" u="none" strike="noStrike" cap="none" normalizeH="0" baseline="0" dirty="0">
+              <a:ln>
+                <a:noFill/>
+              </a:ln>
+              <a:solidFill>
+                <a:schemeClr val="tx1"/>
+              </a:solidFill>
+              <a:effectLst/>
+              <a:latin typeface="Arial" panose="020B0604020202020204" pitchFamily="34" charset="0"/>
+            </a:endParaRPr>
+          </a:p>
+          <a:p>
+            <a:pPr marL="0" marR="0" lvl="0" indent="0" algn="l" defTabSz="914400" rtl="0" eaLnBrk="0" fontAlgn="base" latinLnBrk="0" hangingPunct="0">
+              <a:lnSpc>
+                <a:spcPct val="100000"/>
+              </a:lnSpc>
+              <a:spcBef>
+                <a:spcPct val="0"/>
+              </a:spcBef>
+              <a:spcAft>
+                <a:spcPct val="0"/>
+              </a:spcAft>
+              <a:buClrTx/>
+              <a:buSzTx/>
+              <a:buFontTx/>
+              <a:buChar char="•"/>
+              <a:tabLst/>
+            </a:pPr>
+            <a:r>
+              <a:rPr kumimoji="0" lang="en-US" altLang="en-US" sz="2800" b="0" i="0" u="none" strike="noStrike" cap="none" normalizeH="0" baseline="0" dirty="0">
+                <a:ln>
+                  <a:noFill/>
+                </a:ln>
+                <a:solidFill>
+                  <a:schemeClr val="tx1"/>
+                </a:solidFill>
+                <a:effectLst/>
+                <a:latin typeface="Arial" panose="020B0604020202020204" pitchFamily="34" charset="0"/>
+              </a:rPr>
+              <a:t>Real-time data access </a:t>
             </a:r>
           </a:p>
         </p:txBody>
       </p:sp>
     </p:spTree>
+    <p:extLst>
+      <p:ext uri="{BB962C8B-B14F-4D97-AF65-F5344CB8AC3E}">
+        <p14:creationId xmlns:p14="http://schemas.microsoft.com/office/powerpoint/2010/main" val="3909782519"/>
+      </p:ext>
+    </p:extLst>
   </p:cSld>
   <p:clrMapOvr>
     <a:masterClrMapping/>
@@ -4411,7 +6157,12 @@
           <a:lstStyle/>
           <a:p>
             <a:r>
-              <a:t>Website Pages</a:t>
+              <a:rPr dirty="0">
+                <a:solidFill>
+                  <a:srgbClr val="FF0000"/>
+                </a:solidFill>
+              </a:rPr>
+              <a:t>Technologies Used</a:t>
             </a:r>
           </a:p>
         </p:txBody>
@@ -4433,37 +6184,25 @@
           <a:p>
             <a:r>
               <a:rPr dirty="0"/>
-              <a:t>Home Page</a:t>
+              <a:t>Frontend: HTML, CSS</a:t>
             </a:r>
           </a:p>
           <a:p>
             <a:r>
               <a:rPr dirty="0"/>
-              <a:t>Register Donor Page</a:t>
+              <a:t>Backend: PHP</a:t>
             </a:r>
           </a:p>
           <a:p>
             <a:r>
               <a:rPr dirty="0"/>
-              <a:t>Search Donor Page</a:t>
+              <a:t>Database: MySQL</a:t>
             </a:r>
           </a:p>
           <a:p>
             <a:r>
               <a:rPr dirty="0"/>
-              <a:t>Blood Request Page</a:t>
-            </a:r>
-          </a:p>
-          <a:p>
-            <a:r>
-              <a:rPr dirty="0"/>
-              <a:t>Contact Page</a:t>
-            </a:r>
-          </a:p>
-          <a:p>
-            <a:r>
-              <a:rPr dirty="0"/>
-              <a:t>Admin Dashboard</a:t>
+              <a:t>Server: XAMPP</a:t>
             </a:r>
           </a:p>
         </p:txBody>
@@ -4509,71 +6248,441 @@
           <a:lstStyle/>
           <a:p>
             <a:r>
-              <a:t>Database Design</a:t>
-            </a:r>
-          </a:p>
-        </p:txBody>
-      </p:sp>
-      <p:sp>
-        <p:nvSpPr>
-          <p:cNvPr id="3" name="Content Placeholder 2"/>
-          <p:cNvSpPr>
-            <a:spLocks noGrp="1"/>
+              <a:rPr lang="en-IN" dirty="0">
+                <a:solidFill>
+                  <a:srgbClr val="FF0000"/>
+                </a:solidFill>
+              </a:rPr>
+              <a:t>Key Features</a:t>
+            </a:r>
+            <a:endParaRPr dirty="0">
+              <a:solidFill>
+                <a:srgbClr val="FF0000"/>
+              </a:solidFill>
+            </a:endParaRPr>
+          </a:p>
+        </p:txBody>
+      </p:sp>
+      <p:sp>
+        <p:nvSpPr>
+          <p:cNvPr id="5" name="Rectangle 2">
+            <a:extLst>
+              <a:ext uri="{FF2B5EF4-FFF2-40B4-BE49-F238E27FC236}">
+                <a16:creationId xmlns:a16="http://schemas.microsoft.com/office/drawing/2014/main" id="{49BC939F-CB63-F59D-555E-07BDCB75D658}"/>
+              </a:ext>
+            </a:extLst>
+          </p:cNvPr>
+          <p:cNvSpPr>
+            <a:spLocks noGrp="1" noChangeArrowheads="1"/>
           </p:cNvSpPr>
           <p:nvPr>
             <p:ph idx="1"/>
           </p:nvPr>
         </p:nvSpPr>
-        <p:spPr/>
-        <p:txBody>
-          <a:bodyPr/>
+        <p:spPr bwMode="auto">
+          <a:xfrm>
+            <a:off x="457200" y="1308636"/>
+            <a:ext cx="4545860" cy="5109091"/>
+          </a:xfrm>
+          <a:prstGeom prst="rect">
+            <a:avLst/>
+          </a:prstGeom>
+          <a:noFill/>
+          <a:ln>
+            <a:noFill/>
+          </a:ln>
+          <a:effectLst/>
+          <a:extLst>
+            <a:ext uri="{909E8E84-426E-40DD-AFC4-6F175D3DCCD1}">
+              <a14:hiddenFill xmlns:a14="http://schemas.microsoft.com/office/drawing/2010/main">
+                <a:solidFill>
+                  <a:schemeClr val="accent1"/>
+                </a:solidFill>
+              </a14:hiddenFill>
+            </a:ext>
+            <a:ext uri="{91240B29-F687-4F45-9708-019B960494DF}">
+              <a14:hiddenLine xmlns:a14="http://schemas.microsoft.com/office/drawing/2010/main" w="9525">
+                <a:solidFill>
+                  <a:schemeClr val="tx1"/>
+                </a:solidFill>
+                <a:miter lim="800000"/>
+                <a:headEnd/>
+                <a:tailEnd/>
+              </a14:hiddenLine>
+            </a:ext>
+            <a:ext uri="{AF507438-7753-43E0-B8FC-AC1667EBCBE1}">
+              <a14:hiddenEffects xmlns:a14="http://schemas.microsoft.com/office/drawing/2010/main">
+                <a:effectLst>
+                  <a:outerShdw dist="35921" dir="2700000" algn="ctr" rotWithShape="0">
+                    <a:schemeClr val="bg2"/>
+                  </a:outerShdw>
+                </a:effectLst>
+              </a14:hiddenEffects>
+            </a:ext>
+          </a:extLst>
+        </p:spPr>
+        <p:txBody>
+          <a:bodyPr vert="horz" wrap="none" lIns="91440" tIns="45720" rIns="91440" bIns="45720" numCol="1" anchor="ctr" anchorCtr="0" compatLnSpc="1">
+            <a:prstTxWarp prst="textNoShape">
+              <a:avLst/>
+            </a:prstTxWarp>
+            <a:spAutoFit/>
+          </a:bodyPr>
           <a:lstStyle/>
           <a:p>
-            <a:pPr marL="0" indent="0">
-              <a:buNone/>
+            <a:pPr marL="0" marR="0" lvl="0" indent="0" algn="l" defTabSz="914400" rtl="0" eaLnBrk="0" fontAlgn="base" latinLnBrk="0" hangingPunct="0">
+              <a:lnSpc>
+                <a:spcPct val="100000"/>
+              </a:lnSpc>
+              <a:spcBef>
+                <a:spcPct val="0"/>
+              </a:spcBef>
+              <a:spcAft>
+                <a:spcPct val="0"/>
+              </a:spcAft>
+              <a:buClrTx/>
+              <a:buSzTx/>
+              <a:buFontTx/>
+              <a:buNone/>
+              <a:tabLst/>
             </a:pPr>
-            <a:r>
-              <a:rPr dirty="0"/>
-              <a:t>Tables Used:</a:t>
-            </a:r>
-          </a:p>
-          <a:p>
-            <a:r>
-              <a:rPr dirty="0"/>
-              <a:t>donors</a:t>
-            </a:r>
-          </a:p>
-          <a:p>
-            <a:r>
-              <a:rPr dirty="0" err="1"/>
-              <a:t>blood_requests</a:t>
-            </a:r>
-            <a:endParaRPr dirty="0"/>
-          </a:p>
-          <a:p>
-            <a:r>
-              <a:rPr lang="en-IN" dirty="0"/>
-              <a:t>A</a:t>
-            </a:r>
-            <a:r>
-              <a:rPr dirty="0" err="1"/>
-              <a:t>dmin</a:t>
-            </a:r>
-            <a:endParaRPr lang="en-IN" dirty="0"/>
-          </a:p>
-          <a:p>
-            <a:pPr marL="0" indent="0">
-              <a:buNone/>
+            <a:endParaRPr kumimoji="0" lang="en-US" altLang="en-US" sz="1800" b="0" i="0" u="none" strike="noStrike" cap="none" normalizeH="0" baseline="0" dirty="0">
+              <a:ln>
+                <a:noFill/>
+              </a:ln>
+              <a:solidFill>
+                <a:schemeClr val="tx1"/>
+              </a:solidFill>
+              <a:effectLst/>
+              <a:latin typeface="Arial" panose="020B0604020202020204" pitchFamily="34" charset="0"/>
+            </a:endParaRPr>
+          </a:p>
+          <a:p>
+            <a:pPr marL="0" marR="0" lvl="0" indent="0" algn="l" defTabSz="914400" rtl="0" eaLnBrk="0" fontAlgn="base" latinLnBrk="0" hangingPunct="0">
+              <a:lnSpc>
+                <a:spcPct val="100000"/>
+              </a:lnSpc>
+              <a:spcBef>
+                <a:spcPct val="0"/>
+              </a:spcBef>
+              <a:spcAft>
+                <a:spcPct val="0"/>
+              </a:spcAft>
+              <a:buClrTx/>
+              <a:buSzTx/>
+              <a:buFontTx/>
+              <a:buChar char="•"/>
+              <a:tabLst/>
             </a:pPr>
-            <a:endParaRPr dirty="0"/>
-          </a:p>
-          <a:p>
-            <a:pPr marL="0" indent="0">
-              <a:buNone/>
+            <a:r>
+              <a:rPr kumimoji="0" lang="en-US" altLang="en-US" sz="2800" b="0" i="0" u="none" strike="noStrike" cap="none" normalizeH="0" baseline="0" dirty="0">
+                <a:ln>
+                  <a:noFill/>
+                </a:ln>
+                <a:solidFill>
+                  <a:schemeClr val="tx1"/>
+                </a:solidFill>
+                <a:effectLst/>
+                <a:latin typeface="Arial" panose="020B0604020202020204" pitchFamily="34" charset="0"/>
+              </a:rPr>
+              <a:t>Donor Registration </a:t>
+            </a:r>
+          </a:p>
+          <a:p>
+            <a:pPr marL="0" marR="0" lvl="0" indent="0" algn="l" defTabSz="914400" rtl="0" eaLnBrk="0" fontAlgn="base" latinLnBrk="0" hangingPunct="0">
+              <a:lnSpc>
+                <a:spcPct val="100000"/>
+              </a:lnSpc>
+              <a:spcBef>
+                <a:spcPct val="0"/>
+              </a:spcBef>
+              <a:spcAft>
+                <a:spcPct val="0"/>
+              </a:spcAft>
+              <a:buClrTx/>
+              <a:buSzTx/>
+              <a:buFontTx/>
+              <a:buChar char="•"/>
+              <a:tabLst/>
             </a:pPr>
-            <a:r>
-              <a:rPr dirty="0"/>
-              <a:t>The database stores donor details and blood requests.</a:t>
+            <a:endParaRPr kumimoji="0" lang="en-US" altLang="en-US" sz="2800" b="0" i="0" u="none" strike="noStrike" cap="none" normalizeH="0" baseline="0" dirty="0">
+              <a:ln>
+                <a:noFill/>
+              </a:ln>
+              <a:solidFill>
+                <a:schemeClr val="tx1"/>
+              </a:solidFill>
+              <a:effectLst/>
+              <a:latin typeface="Arial" panose="020B0604020202020204" pitchFamily="34" charset="0"/>
+            </a:endParaRPr>
+          </a:p>
+          <a:p>
+            <a:pPr marL="0" marR="0" lvl="0" indent="0" algn="l" defTabSz="914400" rtl="0" eaLnBrk="0" fontAlgn="base" latinLnBrk="0" hangingPunct="0">
+              <a:lnSpc>
+                <a:spcPct val="100000"/>
+              </a:lnSpc>
+              <a:spcBef>
+                <a:spcPct val="0"/>
+              </a:spcBef>
+              <a:spcAft>
+                <a:spcPct val="0"/>
+              </a:spcAft>
+              <a:buClrTx/>
+              <a:buSzTx/>
+              <a:buFontTx/>
+              <a:buChar char="•"/>
+              <a:tabLst/>
+            </a:pPr>
+            <a:r>
+              <a:rPr kumimoji="0" lang="en-US" altLang="en-US" sz="2800" b="0" i="0" u="none" strike="noStrike" cap="none" normalizeH="0" baseline="0" dirty="0">
+                <a:ln>
+                  <a:noFill/>
+                </a:ln>
+                <a:solidFill>
+                  <a:schemeClr val="tx1"/>
+                </a:solidFill>
+                <a:effectLst/>
+                <a:latin typeface="Arial" panose="020B0604020202020204" pitchFamily="34" charset="0"/>
+              </a:rPr>
+              <a:t>Search Donor</a:t>
+            </a:r>
+          </a:p>
+          <a:p>
+            <a:pPr marL="0" marR="0" lvl="0" indent="0" algn="l" defTabSz="914400" rtl="0" eaLnBrk="0" fontAlgn="base" latinLnBrk="0" hangingPunct="0">
+              <a:lnSpc>
+                <a:spcPct val="100000"/>
+              </a:lnSpc>
+              <a:spcBef>
+                <a:spcPct val="0"/>
+              </a:spcBef>
+              <a:spcAft>
+                <a:spcPct val="0"/>
+              </a:spcAft>
+              <a:buClrTx/>
+              <a:buSzTx/>
+              <a:buNone/>
+              <a:tabLst/>
+            </a:pPr>
+            <a:r>
+              <a:rPr kumimoji="0" lang="en-US" altLang="en-US" sz="2800" b="0" i="0" u="none" strike="noStrike" cap="none" normalizeH="0" baseline="0" dirty="0">
+                <a:ln>
+                  <a:noFill/>
+                </a:ln>
+                <a:solidFill>
+                  <a:schemeClr val="tx1"/>
+                </a:solidFill>
+                <a:effectLst/>
+                <a:latin typeface="Arial" panose="020B0604020202020204" pitchFamily="34" charset="0"/>
+              </a:rPr>
+              <a:t> </a:t>
+            </a:r>
+          </a:p>
+          <a:p>
+            <a:pPr marL="0" marR="0" lvl="0" indent="0" algn="l" defTabSz="914400" rtl="0" eaLnBrk="0" fontAlgn="base" latinLnBrk="0" hangingPunct="0">
+              <a:lnSpc>
+                <a:spcPct val="100000"/>
+              </a:lnSpc>
+              <a:spcBef>
+                <a:spcPct val="0"/>
+              </a:spcBef>
+              <a:spcAft>
+                <a:spcPct val="0"/>
+              </a:spcAft>
+              <a:buClrTx/>
+              <a:buSzTx/>
+              <a:buFontTx/>
+              <a:buChar char="•"/>
+              <a:tabLst/>
+            </a:pPr>
+            <a:r>
+              <a:rPr kumimoji="0" lang="en-US" altLang="en-US" sz="2800" b="0" i="0" u="none" strike="noStrike" cap="none" normalizeH="0" baseline="0" dirty="0">
+                <a:ln>
+                  <a:noFill/>
+                </a:ln>
+                <a:solidFill>
+                  <a:schemeClr val="tx1"/>
+                </a:solidFill>
+                <a:effectLst/>
+                <a:latin typeface="Arial" panose="020B0604020202020204" pitchFamily="34" charset="0"/>
+              </a:rPr>
+              <a:t>Blood Request Form </a:t>
+            </a:r>
+          </a:p>
+          <a:p>
+            <a:pPr marL="0" marR="0" lvl="0" indent="0" algn="l" defTabSz="914400" rtl="0" eaLnBrk="0" fontAlgn="base" latinLnBrk="0" hangingPunct="0">
+              <a:lnSpc>
+                <a:spcPct val="100000"/>
+              </a:lnSpc>
+              <a:spcBef>
+                <a:spcPct val="0"/>
+              </a:spcBef>
+              <a:spcAft>
+                <a:spcPct val="0"/>
+              </a:spcAft>
+              <a:buClrTx/>
+              <a:buSzTx/>
+              <a:buFontTx/>
+              <a:buChar char="•"/>
+              <a:tabLst/>
+            </a:pPr>
+            <a:endParaRPr kumimoji="0" lang="en-US" altLang="en-US" sz="2800" b="0" i="0" u="none" strike="noStrike" cap="none" normalizeH="0" baseline="0" dirty="0">
+              <a:ln>
+                <a:noFill/>
+              </a:ln>
+              <a:solidFill>
+                <a:schemeClr val="tx1"/>
+              </a:solidFill>
+              <a:effectLst/>
+              <a:latin typeface="Arial" panose="020B0604020202020204" pitchFamily="34" charset="0"/>
+            </a:endParaRPr>
+          </a:p>
+          <a:p>
+            <a:pPr marL="0" marR="0" lvl="0" indent="0" algn="l" defTabSz="914400" rtl="0" eaLnBrk="0" fontAlgn="base" latinLnBrk="0" hangingPunct="0">
+              <a:lnSpc>
+                <a:spcPct val="100000"/>
+              </a:lnSpc>
+              <a:spcBef>
+                <a:spcPct val="0"/>
+              </a:spcBef>
+              <a:spcAft>
+                <a:spcPct val="0"/>
+              </a:spcAft>
+              <a:buClrTx/>
+              <a:buSzTx/>
+              <a:buFontTx/>
+              <a:buChar char="•"/>
+              <a:tabLst/>
+            </a:pPr>
+            <a:r>
+              <a:rPr kumimoji="0" lang="en-US" altLang="en-US" sz="2800" b="0" i="0" u="none" strike="noStrike" cap="none" normalizeH="0" baseline="0" dirty="0">
+                <a:ln>
+                  <a:noFill/>
+                </a:ln>
+                <a:solidFill>
+                  <a:schemeClr val="tx1"/>
+                </a:solidFill>
+                <a:effectLst/>
+                <a:latin typeface="Arial" panose="020B0604020202020204" pitchFamily="34" charset="0"/>
+              </a:rPr>
+              <a:t>Donor List Display </a:t>
+            </a:r>
+          </a:p>
+          <a:p>
+            <a:pPr marL="0" marR="0" lvl="0" indent="0" algn="l" defTabSz="914400" rtl="0" eaLnBrk="0" fontAlgn="base" latinLnBrk="0" hangingPunct="0">
+              <a:lnSpc>
+                <a:spcPct val="100000"/>
+              </a:lnSpc>
+              <a:spcBef>
+                <a:spcPct val="0"/>
+              </a:spcBef>
+              <a:spcAft>
+                <a:spcPct val="0"/>
+              </a:spcAft>
+              <a:buClrTx/>
+              <a:buSzTx/>
+              <a:buFontTx/>
+              <a:buChar char="•"/>
+              <a:tabLst/>
+            </a:pPr>
+            <a:endParaRPr kumimoji="0" lang="en-US" altLang="en-US" sz="2800" b="0" i="0" u="none" strike="noStrike" cap="none" normalizeH="0" baseline="0" dirty="0">
+              <a:ln>
+                <a:noFill/>
+              </a:ln>
+              <a:solidFill>
+                <a:schemeClr val="tx1"/>
+              </a:solidFill>
+              <a:effectLst/>
+              <a:latin typeface="Arial" panose="020B0604020202020204" pitchFamily="34" charset="0"/>
+            </a:endParaRPr>
+          </a:p>
+          <a:p>
+            <a:pPr marL="0" marR="0" lvl="0" indent="0" algn="l" defTabSz="914400" rtl="0" eaLnBrk="0" fontAlgn="base" latinLnBrk="0" hangingPunct="0">
+              <a:lnSpc>
+                <a:spcPct val="100000"/>
+              </a:lnSpc>
+              <a:spcBef>
+                <a:spcPct val="0"/>
+              </a:spcBef>
+              <a:spcAft>
+                <a:spcPct val="0"/>
+              </a:spcAft>
+              <a:buClrTx/>
+              <a:buSzTx/>
+              <a:buFontTx/>
+              <a:buChar char="•"/>
+              <a:tabLst/>
+            </a:pPr>
+            <a:r>
+              <a:rPr kumimoji="0" lang="en-US" altLang="en-US" sz="2800" b="0" i="0" u="none" strike="noStrike" cap="none" normalizeH="0" baseline="0" dirty="0">
+                <a:ln>
+                  <a:noFill/>
+                </a:ln>
+                <a:solidFill>
+                  <a:schemeClr val="tx1"/>
+                </a:solidFill>
+                <a:effectLst/>
+                <a:latin typeface="Arial" panose="020B0604020202020204" pitchFamily="34" charset="0"/>
+              </a:rPr>
+              <a:t>Admin Panel </a:t>
+            </a:r>
+          </a:p>
+          <a:p>
+            <a:pPr marL="0" marR="0" lvl="0" indent="0" algn="l" defTabSz="914400" rtl="0" eaLnBrk="0" fontAlgn="base" latinLnBrk="0" hangingPunct="0">
+              <a:lnSpc>
+                <a:spcPct val="100000"/>
+              </a:lnSpc>
+              <a:spcBef>
+                <a:spcPct val="0"/>
+              </a:spcBef>
+              <a:spcAft>
+                <a:spcPct val="0"/>
+              </a:spcAft>
+              <a:buClrTx/>
+              <a:buSzTx/>
+              <a:buFontTx/>
+              <a:buChar char="•"/>
+              <a:tabLst/>
+            </a:pPr>
+            <a:endParaRPr kumimoji="0" lang="en-US" altLang="en-US" sz="2800" b="0" i="0" u="none" strike="noStrike" cap="none" normalizeH="0" baseline="0" dirty="0">
+              <a:ln>
+                <a:noFill/>
+              </a:ln>
+              <a:solidFill>
+                <a:schemeClr val="tx1"/>
+              </a:solidFill>
+              <a:effectLst/>
+              <a:latin typeface="Arial" panose="020B0604020202020204" pitchFamily="34" charset="0"/>
+            </a:endParaRPr>
+          </a:p>
+          <a:p>
+            <a:pPr marL="0" marR="0" lvl="0" indent="0" algn="l" defTabSz="914400" rtl="0" eaLnBrk="0" fontAlgn="base" latinLnBrk="0" hangingPunct="0">
+              <a:lnSpc>
+                <a:spcPct val="100000"/>
+              </a:lnSpc>
+              <a:spcBef>
+                <a:spcPct val="0"/>
+              </a:spcBef>
+              <a:spcAft>
+                <a:spcPct val="0"/>
+              </a:spcAft>
+              <a:buClrTx/>
+              <a:buSzTx/>
+              <a:buFontTx/>
+              <a:buChar char="•"/>
+              <a:tabLst/>
+            </a:pPr>
+            <a:r>
+              <a:rPr kumimoji="0" lang="en-US" altLang="en-US" sz="2800" b="0" i="0" u="none" strike="noStrike" cap="none" normalizeH="0" baseline="0" dirty="0">
+                <a:ln>
+                  <a:noFill/>
+                </a:ln>
+                <a:solidFill>
+                  <a:schemeClr val="tx1"/>
+                </a:solidFill>
+                <a:effectLst/>
+                <a:latin typeface="Arial" panose="020B0604020202020204" pitchFamily="34" charset="0"/>
+              </a:rPr>
+              <a:t>Request Approval System </a:t>
             </a:r>
           </a:p>
         </p:txBody>
@@ -4619,8 +6728,18 @@
           <a:lstStyle/>
           <a:p>
             <a:r>
-              <a:t>User Interface Design</a:t>
-            </a:r>
+              <a:rPr lang="en-IN" dirty="0">
+                <a:solidFill>
+                  <a:srgbClr val="FF0000"/>
+                </a:solidFill>
+              </a:rPr>
+              <a:t>System Modules</a:t>
+            </a:r>
+            <a:endParaRPr dirty="0">
+              <a:solidFill>
+                <a:srgbClr val="FF0000"/>
+              </a:solidFill>
+            </a:endParaRPr>
           </a:p>
         </p:txBody>
       </p:sp>
@@ -4640,19 +6759,46 @@
           <a:lstStyle/>
           <a:p>
             <a:r>
-              <a:rPr dirty="0"/>
-              <a:t>Designed using a simple and clean layout.</a:t>
-            </a:r>
-          </a:p>
-          <a:p>
-            <a:r>
-              <a:rPr dirty="0"/>
-              <a:t>Includes navigation bar, forms, tables, and responsive UI</a:t>
-            </a:r>
-            <a:r>
-              <a:rPr lang="en-IN" dirty="0"/>
-              <a:t>.</a:t>
-            </a:r>
+              <a:rPr lang="en-US" b="1"/>
+              <a:t>Donor Module</a:t>
+            </a:r>
+            <a:r>
+              <a:rPr lang="en-US"/>
+              <a:t> – Register &amp; store donor details </a:t>
+            </a:r>
+          </a:p>
+          <a:p>
+            <a:r>
+              <a:rPr lang="en-US" b="1" dirty="0"/>
+              <a:t>Search Module</a:t>
+            </a:r>
+            <a:r>
+              <a:rPr lang="en-US" dirty="0"/>
+              <a:t> – Find donors easily </a:t>
+            </a:r>
+          </a:p>
+          <a:p>
+            <a:r>
+              <a:rPr lang="en-US" b="1" dirty="0"/>
+              <a:t>Request Module</a:t>
+            </a:r>
+            <a:r>
+              <a:rPr lang="en-US" dirty="0"/>
+              <a:t> – Submit blood requests </a:t>
+            </a:r>
+          </a:p>
+          <a:p>
+            <a:r>
+              <a:rPr lang="en-US" b="1" dirty="0"/>
+              <a:t>Admin Module</a:t>
+            </a:r>
+            <a:r>
+              <a:rPr lang="en-US" dirty="0"/>
+              <a:t> – Manage system data </a:t>
+            </a:r>
+          </a:p>
+          <a:p>
+            <a:endParaRPr dirty="0"/>
           </a:p>
         </p:txBody>
       </p:sp>
